--- a/assets/template_mi_identidad.pptx
+++ b/assets/template_mi_identidad.pptx
@@ -1,35 +1,35 @@
 
 <file path=ppt/presentation.xml><?xml version="1.0" encoding="utf-8"?>
-<p:presentation xmlns:a="http://schemas.openxmlformats.org/drawingml/2006/main" xmlns:r="http://schemas.openxmlformats.org/officeDocument/2006/relationships" xmlns:mc="http://schemas.openxmlformats.org/markup-compatibility/2006" xmlns:mv="urn:schemas-microsoft-com:mac:vml" xmlns:p="http://schemas.openxmlformats.org/presentationml/2006/main" xmlns:c="http://schemas.openxmlformats.org/drawingml/2006/chart" xmlns:dgm="http://schemas.openxmlformats.org/drawingml/2006/diagram" xmlns:o="urn:schemas-microsoft-com:office:office" xmlns:v="urn:schemas-microsoft-com:vml" xmlns:pvml="urn:schemas-microsoft-com:office:powerpoint" xmlns:com="http://schemas.openxmlformats.org/drawingml/2006/compatibility" xmlns:p14="http://schemas.microsoft.com/office/powerpoint/2010/main" xmlns:p15="http://schemas.microsoft.com/office/powerpoint/2012/main" xmlns:ahyp="http://schemas.microsoft.com/office/drawing/2018/hyperlinkcolor" autoCompressPictures="0" embedTrueTypeFonts="1" strictFirstAndLastChars="0" saveSubsetFonts="1">
+<p:presentation xmlns:a="http://schemas.openxmlformats.org/drawingml/2006/main" xmlns:r="http://schemas.openxmlformats.org/officeDocument/2006/relationships" xmlns:p="http://schemas.openxmlformats.org/presentationml/2006/main" strictFirstAndLastChars="0" embedTrueTypeFonts="1" saveSubsetFonts="1" autoCompressPictures="0">
   <p:sldMasterIdLst>
-    <p:sldMasterId id="2147483659" r:id="rId4"/>
+    <p:sldMasterId id="2147483659" r:id="rId1"/>
   </p:sldMasterIdLst>
   <p:notesMasterIdLst>
-    <p:notesMasterId r:id="rId5"/>
+    <p:notesMasterId r:id="rId3"/>
   </p:notesMasterIdLst>
   <p:sldIdLst>
-    <p:sldId id="256" r:id="rId6"/>
+    <p:sldId id="256" r:id="rId2"/>
   </p:sldIdLst>
-  <p:sldSz cy="5143500" cx="9144000"/>
+  <p:sldSz cx="9144000" cy="5143500" type="screen16x9"/>
   <p:notesSz cx="6858000" cy="9144000"/>
   <p:embeddedFontLst>
     <p:embeddedFont>
-      <p:font typeface="Archivo Medium"/>
-      <p:regular r:id="rId7"/>
-      <p:bold r:id="rId8"/>
-      <p:italic r:id="rId9"/>
-      <p:boldItalic r:id="rId10"/>
+      <p:font typeface="Archivo" panose="020B0604020202020204" charset="0"/>
+      <p:regular r:id="rId4"/>
+      <p:bold r:id="rId5"/>
+      <p:italic r:id="rId6"/>
+      <p:boldItalic r:id="rId7"/>
     </p:embeddedFont>
     <p:embeddedFont>
-      <p:font typeface="Archivo"/>
-      <p:regular r:id="rId11"/>
-      <p:bold r:id="rId12"/>
-      <p:italic r:id="rId13"/>
-      <p:boldItalic r:id="rId14"/>
+      <p:font typeface="Archivo Medium" panose="020B0604020202020204" charset="0"/>
+      <p:regular r:id="rId8"/>
+      <p:bold r:id="rId9"/>
+      <p:italic r:id="rId10"/>
+      <p:boldItalic r:id="rId11"/>
     </p:embeddedFont>
   </p:embeddedFontLst>
   <p:defaultTextStyle>
-    <a:defPPr lvl="0" marR="0" rtl="0" algn="l">
+    <a:defPPr marR="0" lvl="0" algn="l" rtl="0">
       <a:lnSpc>
         <a:spcPct val="100000"/>
       </a:lnSpc>
@@ -40,7 +40,7 @@
         <a:spcPts val="0"/>
       </a:spcAft>
     </a:defPPr>
-    <a:lvl1pPr lvl="0" marR="0" rtl="0" algn="l">
+    <a:lvl1pPr marR="0" lvl="0" algn="l" rtl="0">
       <a:lnSpc>
         <a:spcPct val="100000"/>
       </a:lnSpc>
@@ -54,7 +54,7 @@
         <a:srgbClr val="000000"/>
       </a:buClr>
       <a:buFont typeface="Arial"/>
-      <a:defRPr b="0" i="0" spc="0" sz="1400" u="none" cap="none" strike="noStrike">
+      <a:defRPr sz="1400" b="0" i="0" u="none" strike="noStrike" cap="none" spc="0">
         <a:solidFill>
           <a:srgbClr val="000000"/>
         </a:solidFill>
@@ -64,7 +64,7 @@
         <a:sym typeface="Arial"/>
       </a:defRPr>
     </a:lvl1pPr>
-    <a:lvl2pPr lvl="1" marR="0" rtl="0" algn="l">
+    <a:lvl2pPr marR="0" lvl="1" algn="l" rtl="0">
       <a:lnSpc>
         <a:spcPct val="100000"/>
       </a:lnSpc>
@@ -78,7 +78,7 @@
         <a:srgbClr val="000000"/>
       </a:buClr>
       <a:buFont typeface="Arial"/>
-      <a:defRPr b="0" i="0" spc="0" sz="1400" u="none" cap="none" strike="noStrike">
+      <a:defRPr sz="1400" b="0" i="0" u="none" strike="noStrike" cap="none" spc="0">
         <a:solidFill>
           <a:srgbClr val="000000"/>
         </a:solidFill>
@@ -88,7 +88,7 @@
         <a:sym typeface="Arial"/>
       </a:defRPr>
     </a:lvl2pPr>
-    <a:lvl3pPr lvl="2" marR="0" rtl="0" algn="l">
+    <a:lvl3pPr marR="0" lvl="2" algn="l" rtl="0">
       <a:lnSpc>
         <a:spcPct val="100000"/>
       </a:lnSpc>
@@ -102,7 +102,7 @@
         <a:srgbClr val="000000"/>
       </a:buClr>
       <a:buFont typeface="Arial"/>
-      <a:defRPr b="0" i="0" spc="0" sz="1400" u="none" cap="none" strike="noStrike">
+      <a:defRPr sz="1400" b="0" i="0" u="none" strike="noStrike" cap="none" spc="0">
         <a:solidFill>
           <a:srgbClr val="000000"/>
         </a:solidFill>
@@ -112,7 +112,7 @@
         <a:sym typeface="Arial"/>
       </a:defRPr>
     </a:lvl3pPr>
-    <a:lvl4pPr lvl="3" marR="0" rtl="0" algn="l">
+    <a:lvl4pPr marR="0" lvl="3" algn="l" rtl="0">
       <a:lnSpc>
         <a:spcPct val="100000"/>
       </a:lnSpc>
@@ -126,7 +126,7 @@
         <a:srgbClr val="000000"/>
       </a:buClr>
       <a:buFont typeface="Arial"/>
-      <a:defRPr b="0" i="0" spc="0" sz="1400" u="none" cap="none" strike="noStrike">
+      <a:defRPr sz="1400" b="0" i="0" u="none" strike="noStrike" cap="none" spc="0">
         <a:solidFill>
           <a:srgbClr val="000000"/>
         </a:solidFill>
@@ -136,7 +136,7 @@
         <a:sym typeface="Arial"/>
       </a:defRPr>
     </a:lvl4pPr>
-    <a:lvl5pPr lvl="4" marR="0" rtl="0" algn="l">
+    <a:lvl5pPr marR="0" lvl="4" algn="l" rtl="0">
       <a:lnSpc>
         <a:spcPct val="100000"/>
       </a:lnSpc>
@@ -150,7 +150,7 @@
         <a:srgbClr val="000000"/>
       </a:buClr>
       <a:buFont typeface="Arial"/>
-      <a:defRPr b="0" i="0" spc="0" sz="1400" u="none" cap="none" strike="noStrike">
+      <a:defRPr sz="1400" b="0" i="0" u="none" strike="noStrike" cap="none" spc="0">
         <a:solidFill>
           <a:srgbClr val="000000"/>
         </a:solidFill>
@@ -160,7 +160,7 @@
         <a:sym typeface="Arial"/>
       </a:defRPr>
     </a:lvl5pPr>
-    <a:lvl6pPr lvl="5" marR="0" rtl="0" algn="l">
+    <a:lvl6pPr marR="0" lvl="5" algn="l" rtl="0">
       <a:lnSpc>
         <a:spcPct val="100000"/>
       </a:lnSpc>
@@ -174,7 +174,7 @@
         <a:srgbClr val="000000"/>
       </a:buClr>
       <a:buFont typeface="Arial"/>
-      <a:defRPr b="0" i="0" spc="0" sz="1400" u="none" cap="none" strike="noStrike">
+      <a:defRPr sz="1400" b="0" i="0" u="none" strike="noStrike" cap="none" spc="0">
         <a:solidFill>
           <a:srgbClr val="000000"/>
         </a:solidFill>
@@ -184,7 +184,7 @@
         <a:sym typeface="Arial"/>
       </a:defRPr>
     </a:lvl6pPr>
-    <a:lvl7pPr lvl="6" marR="0" rtl="0" algn="l">
+    <a:lvl7pPr marR="0" lvl="6" algn="l" rtl="0">
       <a:lnSpc>
         <a:spcPct val="100000"/>
       </a:lnSpc>
@@ -198,7 +198,7 @@
         <a:srgbClr val="000000"/>
       </a:buClr>
       <a:buFont typeface="Arial"/>
-      <a:defRPr b="0" i="0" spc="0" sz="1400" u="none" cap="none" strike="noStrike">
+      <a:defRPr sz="1400" b="0" i="0" u="none" strike="noStrike" cap="none" spc="0">
         <a:solidFill>
           <a:srgbClr val="000000"/>
         </a:solidFill>
@@ -208,7 +208,7 @@
         <a:sym typeface="Arial"/>
       </a:defRPr>
     </a:lvl7pPr>
-    <a:lvl8pPr lvl="7" marR="0" rtl="0" algn="l">
+    <a:lvl8pPr marR="0" lvl="7" algn="l" rtl="0">
       <a:lnSpc>
         <a:spcPct val="100000"/>
       </a:lnSpc>
@@ -222,7 +222,7 @@
         <a:srgbClr val="000000"/>
       </a:buClr>
       <a:buFont typeface="Arial"/>
-      <a:defRPr b="0" i="0" spc="0" sz="1400" u="none" cap="none" strike="noStrike">
+      <a:defRPr sz="1400" b="0" i="0" u="none" strike="noStrike" cap="none" spc="0">
         <a:solidFill>
           <a:srgbClr val="000000"/>
         </a:solidFill>
@@ -232,7 +232,7 @@
         <a:sym typeface="Arial"/>
       </a:defRPr>
     </a:lvl8pPr>
-    <a:lvl9pPr lvl="8" marR="0" rtl="0" algn="l">
+    <a:lvl9pPr marR="0" lvl="8" algn="l" rtl="0">
       <a:lnSpc>
         <a:spcPct val="100000"/>
       </a:lnSpc>
@@ -246,7 +246,7 @@
         <a:srgbClr val="000000"/>
       </a:buClr>
       <a:buFont typeface="Arial"/>
-      <a:defRPr b="0" i="0" spc="0" sz="1400" u="none" cap="none" strike="noStrike">
+      <a:defRPr sz="1400" b="0" i="0" u="none" strike="noStrike" cap="none" spc="0">
         <a:solidFill>
           <a:srgbClr val="000000"/>
         </a:solidFill>
@@ -259,7 +259,7 @@
   </p:defaultTextStyle>
   <p:extLst>
     <p:ext uri="{EFAFB233-063F-42B5-8137-9DF3F51BA10A}">
-      <p15:sldGuideLst>
+      <p15:sldGuideLst xmlns:p15="http://schemas.microsoft.com/office/powerpoint/2012/main">
         <p15:guide id="1" orient="horz" pos="1620">
           <p15:clr>
             <a:srgbClr val="747775"/>
@@ -277,11 +277,16 @@
 </file>
 
 <file path=ppt/notesMasters/notesMaster1.xml><?xml version="1.0" encoding="utf-8"?>
-<p:notesMaster xmlns:a="http://schemas.openxmlformats.org/drawingml/2006/main" xmlns:r="http://schemas.openxmlformats.org/officeDocument/2006/relationships" xmlns:mc="http://schemas.openxmlformats.org/markup-compatibility/2006" xmlns:mv="urn:schemas-microsoft-com:mac:vml" xmlns:p="http://schemas.openxmlformats.org/presentationml/2006/main" xmlns:c="http://schemas.openxmlformats.org/drawingml/2006/chart" xmlns:dgm="http://schemas.openxmlformats.org/drawingml/2006/diagram" xmlns:o="urn:schemas-microsoft-com:office:office" xmlns:v="urn:schemas-microsoft-com:vml" xmlns:pvml="urn:schemas-microsoft-com:office:powerpoint" xmlns:com="http://schemas.openxmlformats.org/drawingml/2006/compatibility" xmlns:p14="http://schemas.microsoft.com/office/powerpoint/2010/main" xmlns:p15="http://schemas.microsoft.com/office/powerpoint/2012/main" xmlns:ahyp="http://schemas.microsoft.com/office/drawing/2018/hyperlinkcolor">
+<p:notesMaster xmlns:a="http://schemas.openxmlformats.org/drawingml/2006/main" xmlns:r="http://schemas.openxmlformats.org/officeDocument/2006/relationships" xmlns:p="http://schemas.openxmlformats.org/presentationml/2006/main">
   <p:cSld>
+    <p:bg>
+      <p:bgRef idx="1001">
+        <a:schemeClr val="bg1"/>
+      </p:bgRef>
+    </p:bg>
     <p:spTree>
       <p:nvGrpSpPr>
-        <p:cNvPr id="2" name="Shape 2"/>
+        <p:cNvPr id="1" name="Shape 2"/>
         <p:cNvGrpSpPr/>
         <p:nvPr/>
       </p:nvGrpSpPr>
@@ -296,9 +301,11 @@
       <p:sp>
         <p:nvSpPr>
           <p:cNvPr id="3" name="Google Shape;3;n"/>
-          <p:cNvSpPr/>
+          <p:cNvSpPr>
+            <a:spLocks noGrp="1" noRot="1" noChangeAspect="1"/>
+          </p:cNvSpPr>
           <p:nvPr>
-            <p:ph idx="2" type="sldImg"/>
+            <p:ph type="sldImg" idx="2"/>
           </p:nvPr>
         </p:nvSpPr>
         <p:spPr>
@@ -307,9 +314,13 @@
             <a:ext cx="6096075" cy="3429000"/>
           </a:xfrm>
           <a:custGeom>
-            <a:rect b="b" l="l" r="r" t="t"/>
+            <a:avLst/>
+            <a:gdLst/>
+            <a:ahLst/>
+            <a:cxnLst/>
+            <a:rect l="l" t="t" r="r" b="b"/>
             <a:pathLst>
-              <a:path extrusionOk="0" h="120000" w="120000">
+              <a:path w="120000" h="120000" extrusionOk="0">
                 <a:moveTo>
                   <a:pt x="0" y="0"/>
                 </a:moveTo>
@@ -327,23 +338,25 @@
             </a:pathLst>
           </a:custGeom>
           <a:noFill/>
-          <a:ln cap="flat" cmpd="sng" w="9525">
+          <a:ln w="9525" cap="flat" cmpd="sng">
             <a:solidFill>
               <a:srgbClr val="000000"/>
             </a:solidFill>
             <a:prstDash val="solid"/>
             <a:round/>
-            <a:headEnd len="sm" w="sm" type="none"/>
-            <a:tailEnd len="sm" w="sm" type="none"/>
+            <a:headEnd type="none" w="sm" len="sm"/>
+            <a:tailEnd type="none" w="sm" len="sm"/>
           </a:ln>
         </p:spPr>
       </p:sp>
       <p:sp>
         <p:nvSpPr>
           <p:cNvPr id="4" name="Google Shape;4;n"/>
-          <p:cNvSpPr txBox="1"/>
+          <p:cNvSpPr txBox="1">
+            <a:spLocks noGrp="1"/>
+          </p:cNvSpPr>
           <p:nvPr>
-            <p:ph idx="1" type="body"/>
+            <p:ph type="body" idx="1"/>
           </p:nvPr>
         </p:nvSpPr>
         <p:spPr>
@@ -360,11 +373,11 @@
           </a:ln>
         </p:spPr>
         <p:txBody>
-          <a:bodyPr anchorCtr="0" anchor="t" bIns="91425" lIns="91425" spcFirstLastPara="1" rIns="91425" wrap="square" tIns="91425">
+          <a:bodyPr spcFirstLastPara="1" wrap="square" lIns="91425" tIns="91425" rIns="91425" bIns="91425" anchor="t" anchorCtr="0">
             <a:noAutofit/>
           </a:bodyPr>
           <a:lstStyle>
-            <a:lvl1pPr indent="-298450" lvl="0" marL="457200">
+            <a:lvl1pPr marL="457200" lvl="0" indent="-298450">
               <a:spcBef>
                 <a:spcPts val="0"/>
               </a:spcBef>
@@ -375,7 +388,7 @@
               <a:buChar char="●"/>
               <a:defRPr sz="1100"/>
             </a:lvl1pPr>
-            <a:lvl2pPr indent="-298450" lvl="1" marL="914400">
+            <a:lvl2pPr marL="914400" lvl="1" indent="-298450">
               <a:spcBef>
                 <a:spcPts val="0"/>
               </a:spcBef>
@@ -386,7 +399,7 @@
               <a:buChar char="○"/>
               <a:defRPr sz="1100"/>
             </a:lvl2pPr>
-            <a:lvl3pPr indent="-298450" lvl="2" marL="1371600">
+            <a:lvl3pPr marL="1371600" lvl="2" indent="-298450">
               <a:spcBef>
                 <a:spcPts val="0"/>
               </a:spcBef>
@@ -397,7 +410,7 @@
               <a:buChar char="■"/>
               <a:defRPr sz="1100"/>
             </a:lvl3pPr>
-            <a:lvl4pPr indent="-298450" lvl="3" marL="1828800">
+            <a:lvl4pPr marL="1828800" lvl="3" indent="-298450">
               <a:spcBef>
                 <a:spcPts val="0"/>
               </a:spcBef>
@@ -408,7 +421,7 @@
               <a:buChar char="●"/>
               <a:defRPr sz="1100"/>
             </a:lvl4pPr>
-            <a:lvl5pPr indent="-298450" lvl="4" marL="2286000">
+            <a:lvl5pPr marL="2286000" lvl="4" indent="-298450">
               <a:spcBef>
                 <a:spcPts val="0"/>
               </a:spcBef>
@@ -419,7 +432,7 @@
               <a:buChar char="○"/>
               <a:defRPr sz="1100"/>
             </a:lvl5pPr>
-            <a:lvl6pPr indent="-298450" lvl="5" marL="2743200">
+            <a:lvl6pPr marL="2743200" lvl="5" indent="-298450">
               <a:spcBef>
                 <a:spcPts val="0"/>
               </a:spcBef>
@@ -430,7 +443,7 @@
               <a:buChar char="■"/>
               <a:defRPr sz="1100"/>
             </a:lvl6pPr>
-            <a:lvl7pPr indent="-298450" lvl="6" marL="3200400">
+            <a:lvl7pPr marL="3200400" lvl="6" indent="-298450">
               <a:spcBef>
                 <a:spcPts val="0"/>
               </a:spcBef>
@@ -441,7 +454,7 @@
               <a:buChar char="●"/>
               <a:defRPr sz="1100"/>
             </a:lvl7pPr>
-            <a:lvl8pPr indent="-298450" lvl="7" marL="3657600">
+            <a:lvl8pPr marL="3657600" lvl="7" indent="-298450">
               <a:spcBef>
                 <a:spcPts val="0"/>
               </a:spcBef>
@@ -452,7 +465,7 @@
               <a:buChar char="○"/>
               <a:defRPr sz="1100"/>
             </a:lvl8pPr>
-            <a:lvl9pPr indent="-298450" lvl="8" marL="4114800">
+            <a:lvl9pPr marL="4114800" lvl="8" indent="-298450">
               <a:spcBef>
                 <a:spcPts val="0"/>
               </a:spcBef>
@@ -464,14 +477,16 @@
               <a:defRPr sz="1100"/>
             </a:lvl9pPr>
           </a:lstStyle>
-          <a:p/>
+          <a:p>
+            <a:endParaRPr/>
+          </a:p>
         </p:txBody>
       </p:sp>
     </p:spTree>
   </p:cSld>
-  <p:clrMap accent1="accent1" accent2="accent2" accent3="accent3" accent4="accent4" accent5="accent5" accent6="accent6" bg1="lt1" bg2="dk2" tx1="dk1" tx2="lt2" folHlink="folHlink" hlink="hlink"/>
+  <p:clrMap bg1="lt1" tx1="dk1" bg2="dk2" tx2="lt2" accent1="accent1" accent2="accent2" accent3="accent3" accent4="accent4" accent5="accent5" accent6="accent6" hlink="hlink" folHlink="folHlink"/>
   <p:notesStyle>
-    <a:defPPr lvl="0" marR="0" rtl="0" algn="l">
+    <a:defPPr marR="0" lvl="0" algn="l" rtl="0">
       <a:lnSpc>
         <a:spcPct val="100000"/>
       </a:lnSpc>
@@ -482,7 +497,7 @@
         <a:spcPts val="0"/>
       </a:spcAft>
     </a:defPPr>
-    <a:lvl1pPr lvl="0" marR="0" rtl="0" algn="l">
+    <a:lvl1pPr marR="0" lvl="0" algn="l" rtl="0">
       <a:lnSpc>
         <a:spcPct val="100000"/>
       </a:lnSpc>
@@ -496,7 +511,7 @@
         <a:srgbClr val="000000"/>
       </a:buClr>
       <a:buFont typeface="Arial"/>
-      <a:defRPr b="0" i="0" spc="0" sz="1400" u="none" cap="none" strike="noStrike">
+      <a:defRPr sz="1400" b="0" i="0" u="none" strike="noStrike" cap="none" spc="0">
         <a:solidFill>
           <a:srgbClr val="000000"/>
         </a:solidFill>
@@ -506,7 +521,7 @@
         <a:sym typeface="Arial"/>
       </a:defRPr>
     </a:lvl1pPr>
-    <a:lvl2pPr lvl="1" marR="0" rtl="0" algn="l">
+    <a:lvl2pPr marR="0" lvl="1" algn="l" rtl="0">
       <a:lnSpc>
         <a:spcPct val="100000"/>
       </a:lnSpc>
@@ -520,7 +535,7 @@
         <a:srgbClr val="000000"/>
       </a:buClr>
       <a:buFont typeface="Arial"/>
-      <a:defRPr b="0" i="0" spc="0" sz="1400" u="none" cap="none" strike="noStrike">
+      <a:defRPr sz="1400" b="0" i="0" u="none" strike="noStrike" cap="none" spc="0">
         <a:solidFill>
           <a:srgbClr val="000000"/>
         </a:solidFill>
@@ -530,7 +545,7 @@
         <a:sym typeface="Arial"/>
       </a:defRPr>
     </a:lvl2pPr>
-    <a:lvl3pPr lvl="2" marR="0" rtl="0" algn="l">
+    <a:lvl3pPr marR="0" lvl="2" algn="l" rtl="0">
       <a:lnSpc>
         <a:spcPct val="100000"/>
       </a:lnSpc>
@@ -544,7 +559,7 @@
         <a:srgbClr val="000000"/>
       </a:buClr>
       <a:buFont typeface="Arial"/>
-      <a:defRPr b="0" i="0" spc="0" sz="1400" u="none" cap="none" strike="noStrike">
+      <a:defRPr sz="1400" b="0" i="0" u="none" strike="noStrike" cap="none" spc="0">
         <a:solidFill>
           <a:srgbClr val="000000"/>
         </a:solidFill>
@@ -554,7 +569,7 @@
         <a:sym typeface="Arial"/>
       </a:defRPr>
     </a:lvl3pPr>
-    <a:lvl4pPr lvl="3" marR="0" rtl="0" algn="l">
+    <a:lvl4pPr marR="0" lvl="3" algn="l" rtl="0">
       <a:lnSpc>
         <a:spcPct val="100000"/>
       </a:lnSpc>
@@ -568,7 +583,7 @@
         <a:srgbClr val="000000"/>
       </a:buClr>
       <a:buFont typeface="Arial"/>
-      <a:defRPr b="0" i="0" spc="0" sz="1400" u="none" cap="none" strike="noStrike">
+      <a:defRPr sz="1400" b="0" i="0" u="none" strike="noStrike" cap="none" spc="0">
         <a:solidFill>
           <a:srgbClr val="000000"/>
         </a:solidFill>
@@ -578,7 +593,7 @@
         <a:sym typeface="Arial"/>
       </a:defRPr>
     </a:lvl4pPr>
-    <a:lvl5pPr lvl="4" marR="0" rtl="0" algn="l">
+    <a:lvl5pPr marR="0" lvl="4" algn="l" rtl="0">
       <a:lnSpc>
         <a:spcPct val="100000"/>
       </a:lnSpc>
@@ -592,7 +607,7 @@
         <a:srgbClr val="000000"/>
       </a:buClr>
       <a:buFont typeface="Arial"/>
-      <a:defRPr b="0" i="0" spc="0" sz="1400" u="none" cap="none" strike="noStrike">
+      <a:defRPr sz="1400" b="0" i="0" u="none" strike="noStrike" cap="none" spc="0">
         <a:solidFill>
           <a:srgbClr val="000000"/>
         </a:solidFill>
@@ -602,7 +617,7 @@
         <a:sym typeface="Arial"/>
       </a:defRPr>
     </a:lvl5pPr>
-    <a:lvl6pPr lvl="5" marR="0" rtl="0" algn="l">
+    <a:lvl6pPr marR="0" lvl="5" algn="l" rtl="0">
       <a:lnSpc>
         <a:spcPct val="100000"/>
       </a:lnSpc>
@@ -616,7 +631,7 @@
         <a:srgbClr val="000000"/>
       </a:buClr>
       <a:buFont typeface="Arial"/>
-      <a:defRPr b="0" i="0" spc="0" sz="1400" u="none" cap="none" strike="noStrike">
+      <a:defRPr sz="1400" b="0" i="0" u="none" strike="noStrike" cap="none" spc="0">
         <a:solidFill>
           <a:srgbClr val="000000"/>
         </a:solidFill>
@@ -626,7 +641,7 @@
         <a:sym typeface="Arial"/>
       </a:defRPr>
     </a:lvl6pPr>
-    <a:lvl7pPr lvl="6" marR="0" rtl="0" algn="l">
+    <a:lvl7pPr marR="0" lvl="6" algn="l" rtl="0">
       <a:lnSpc>
         <a:spcPct val="100000"/>
       </a:lnSpc>
@@ -640,7 +655,7 @@
         <a:srgbClr val="000000"/>
       </a:buClr>
       <a:buFont typeface="Arial"/>
-      <a:defRPr b="0" i="0" spc="0" sz="1400" u="none" cap="none" strike="noStrike">
+      <a:defRPr sz="1400" b="0" i="0" u="none" strike="noStrike" cap="none" spc="0">
         <a:solidFill>
           <a:srgbClr val="000000"/>
         </a:solidFill>
@@ -650,7 +665,7 @@
         <a:sym typeface="Arial"/>
       </a:defRPr>
     </a:lvl7pPr>
-    <a:lvl8pPr lvl="7" marR="0" rtl="0" algn="l">
+    <a:lvl8pPr marR="0" lvl="7" algn="l" rtl="0">
       <a:lnSpc>
         <a:spcPct val="100000"/>
       </a:lnSpc>
@@ -664,7 +679,7 @@
         <a:srgbClr val="000000"/>
       </a:buClr>
       <a:buFont typeface="Arial"/>
-      <a:defRPr b="0" i="0" spc="0" sz="1400" u="none" cap="none" strike="noStrike">
+      <a:defRPr sz="1400" b="0" i="0" u="none" strike="noStrike" cap="none" spc="0">
         <a:solidFill>
           <a:srgbClr val="000000"/>
         </a:solidFill>
@@ -674,7 +689,7 @@
         <a:sym typeface="Arial"/>
       </a:defRPr>
     </a:lvl8pPr>
-    <a:lvl9pPr lvl="8" marR="0" rtl="0" algn="l">
+    <a:lvl9pPr marR="0" lvl="8" algn="l" rtl="0">
       <a:lnSpc>
         <a:spcPct val="100000"/>
       </a:lnSpc>
@@ -688,7 +703,7 @@
         <a:srgbClr val="000000"/>
       </a:buClr>
       <a:buFont typeface="Arial"/>
-      <a:defRPr b="0" i="0" spc="0" sz="1400" u="none" cap="none" strike="noStrike">
+      <a:defRPr sz="1400" b="0" i="0" u="none" strike="noStrike" cap="none" spc="0">
         <a:solidFill>
           <a:srgbClr val="000000"/>
         </a:solidFill>
@@ -703,11 +718,11 @@
 </file>
 
 <file path=ppt/notesSlides/notesSlide1.xml><?xml version="1.0" encoding="utf-8"?>
-<p:notes xmlns:a="http://schemas.openxmlformats.org/drawingml/2006/main" xmlns:r="http://schemas.openxmlformats.org/officeDocument/2006/relationships" xmlns:mc="http://schemas.openxmlformats.org/markup-compatibility/2006" xmlns:mv="urn:schemas-microsoft-com:mac:vml" xmlns:p="http://schemas.openxmlformats.org/presentationml/2006/main" xmlns:c="http://schemas.openxmlformats.org/drawingml/2006/chart" xmlns:dgm="http://schemas.openxmlformats.org/drawingml/2006/diagram" xmlns:o="urn:schemas-microsoft-com:office:office" xmlns:v="urn:schemas-microsoft-com:vml" xmlns:pvml="urn:schemas-microsoft-com:office:powerpoint" xmlns:com="http://schemas.openxmlformats.org/drawingml/2006/compatibility" xmlns:p14="http://schemas.microsoft.com/office/powerpoint/2010/main" xmlns:p15="http://schemas.microsoft.com/office/powerpoint/2012/main" xmlns:ahyp="http://schemas.microsoft.com/office/drawing/2018/hyperlinkcolor" showMasterPhAnim="0" showMasterSp="0">
+<p:notes xmlns:a="http://schemas.openxmlformats.org/drawingml/2006/main" xmlns:r="http://schemas.openxmlformats.org/officeDocument/2006/relationships" xmlns:p="http://schemas.openxmlformats.org/presentationml/2006/main" showMasterSp="0" showMasterPhAnim="0">
   <p:cSld>
     <p:spTree>
       <p:nvGrpSpPr>
-        <p:cNvPr id="50" name="Shape 50"/>
+        <p:cNvPr id="1" name="Shape 50"/>
         <p:cNvGrpSpPr/>
         <p:nvPr/>
       </p:nvGrpSpPr>
@@ -722,20 +737,26 @@
       <p:sp>
         <p:nvSpPr>
           <p:cNvPr id="51" name="Google Shape;51;p:notes"/>
-          <p:cNvSpPr/>
+          <p:cNvSpPr>
+            <a:spLocks noGrp="1" noRot="1" noChangeAspect="1"/>
+          </p:cNvSpPr>
           <p:nvPr>
-            <p:ph idx="2" type="sldImg"/>
+            <p:ph type="sldImg" idx="2"/>
           </p:nvPr>
         </p:nvSpPr>
         <p:spPr>
           <a:xfrm>
-            <a:off x="381300" y="685800"/>
-            <a:ext cx="6096075" cy="3429000"/>
+            <a:off x="381000" y="685800"/>
+            <a:ext cx="6096000" cy="3429000"/>
           </a:xfrm>
           <a:custGeom>
-            <a:rect b="b" l="l" r="r" t="t"/>
+            <a:avLst/>
+            <a:gdLst/>
+            <a:ahLst/>
+            <a:cxnLst/>
+            <a:rect l="l" t="t" r="r" b="b"/>
             <a:pathLst>
-              <a:path extrusionOk="0" h="120000" w="120000">
+              <a:path w="120000" h="120000" extrusionOk="0">
                 <a:moveTo>
                   <a:pt x="0" y="0"/>
                 </a:moveTo>
@@ -757,9 +778,11 @@
       <p:sp>
         <p:nvSpPr>
           <p:cNvPr id="52" name="Google Shape;52;p:notes"/>
-          <p:cNvSpPr txBox="1"/>
+          <p:cNvSpPr txBox="1">
+            <a:spLocks noGrp="1"/>
+          </p:cNvSpPr>
           <p:nvPr>
-            <p:ph idx="1" type="body"/>
+            <p:ph type="body" idx="1"/>
           </p:nvPr>
         </p:nvSpPr>
         <p:spPr>
@@ -772,12 +795,12 @@
           </a:prstGeom>
         </p:spPr>
         <p:txBody>
-          <a:bodyPr anchorCtr="0" anchor="t" bIns="91425" lIns="91425" spcFirstLastPara="1" rIns="91425" wrap="square" tIns="91425">
+          <a:bodyPr spcFirstLastPara="1" wrap="square" lIns="91425" tIns="91425" rIns="91425" bIns="91425" anchor="t" anchorCtr="0">
             <a:noAutofit/>
           </a:bodyPr>
           <a:lstStyle/>
           <a:p>
-            <a:pPr indent="0" lvl="0" marL="0" rtl="0" algn="l">
+            <a:pPr marL="0" lvl="0" indent="0" algn="l" rtl="0">
               <a:spcBef>
                 <a:spcPts val="0"/>
               </a:spcBef>
@@ -786,9 +809,6 @@
               </a:spcAft>
               <a:buNone/>
             </a:pPr>
-            <a:r>
-              <a:t/>
-            </a:r>
             <a:endParaRPr/>
           </a:p>
         </p:txBody>
@@ -802,11 +822,11 @@
 </file>
 
 <file path=ppt/slideLayouts/slideLayout1.xml><?xml version="1.0" encoding="utf-8"?>
-<p:sldLayout xmlns:a="http://schemas.openxmlformats.org/drawingml/2006/main" xmlns:r="http://schemas.openxmlformats.org/officeDocument/2006/relationships" xmlns:mc="http://schemas.openxmlformats.org/markup-compatibility/2006" xmlns:mv="urn:schemas-microsoft-com:mac:vml" xmlns:p="http://schemas.openxmlformats.org/presentationml/2006/main" xmlns:c="http://schemas.openxmlformats.org/drawingml/2006/chart" xmlns:dgm="http://schemas.openxmlformats.org/drawingml/2006/diagram" xmlns:o="urn:schemas-microsoft-com:office:office" xmlns:v="urn:schemas-microsoft-com:vml" xmlns:pvml="urn:schemas-microsoft-com:office:powerpoint" xmlns:com="http://schemas.openxmlformats.org/drawingml/2006/compatibility" xmlns:p14="http://schemas.microsoft.com/office/powerpoint/2010/main" xmlns:p15="http://schemas.microsoft.com/office/powerpoint/2012/main" xmlns:ahyp="http://schemas.microsoft.com/office/drawing/2018/hyperlinkcolor" matchingName="Title slide" type="title">
+<p:sldLayout xmlns:a="http://schemas.openxmlformats.org/drawingml/2006/main" xmlns:r="http://schemas.openxmlformats.org/officeDocument/2006/relationships" xmlns:p="http://schemas.openxmlformats.org/presentationml/2006/main" matchingName="Title slide" type="title">
   <p:cSld name="TITLE">
     <p:spTree>
       <p:nvGrpSpPr>
-        <p:cNvPr id="9" name="Shape 9"/>
+        <p:cNvPr id="1" name="Shape 9"/>
         <p:cNvGrpSpPr/>
         <p:nvPr/>
       </p:nvGrpSpPr>
@@ -821,7 +841,9 @@
       <p:sp>
         <p:nvSpPr>
           <p:cNvPr id="10" name="Google Shape;10;p2"/>
-          <p:cNvSpPr txBox="1"/>
+          <p:cNvSpPr txBox="1">
+            <a:spLocks noGrp="1"/>
+          </p:cNvSpPr>
           <p:nvPr>
             <p:ph type="ctrTitle"/>
           </p:nvPr>
@@ -836,7 +858,7 @@
           </a:prstGeom>
         </p:spPr>
         <p:txBody>
-          <a:bodyPr anchorCtr="0" anchor="b" bIns="91425" lIns="91425" spcFirstLastPara="1" rIns="91425" wrap="square" tIns="91425">
+          <a:bodyPr spcFirstLastPara="1" wrap="square" lIns="91425" tIns="91425" rIns="91425" bIns="91425" anchor="b" anchorCtr="0">
             <a:normAutofit/>
           </a:bodyPr>
           <a:lstStyle>
@@ -940,15 +962,19 @@
               <a:defRPr sz="5200"/>
             </a:lvl9pPr>
           </a:lstStyle>
-          <a:p/>
+          <a:p>
+            <a:endParaRPr/>
+          </a:p>
         </p:txBody>
       </p:sp>
       <p:sp>
         <p:nvSpPr>
           <p:cNvPr id="11" name="Google Shape;11;p2"/>
-          <p:cNvSpPr txBox="1"/>
+          <p:cNvSpPr txBox="1">
+            <a:spLocks noGrp="1"/>
+          </p:cNvSpPr>
           <p:nvPr>
-            <p:ph idx="1" type="subTitle"/>
+            <p:ph type="subTitle" idx="1"/>
           </p:nvPr>
         </p:nvSpPr>
         <p:spPr>
@@ -961,7 +987,7 @@
           </a:prstGeom>
         </p:spPr>
         <p:txBody>
-          <a:bodyPr anchorCtr="0" anchor="t" bIns="91425" lIns="91425" spcFirstLastPara="1" rIns="91425" wrap="square" tIns="91425">
+          <a:bodyPr spcFirstLastPara="1" wrap="square" lIns="91425" tIns="91425" rIns="91425" bIns="91425" anchor="t" anchorCtr="0">
             <a:normAutofit/>
           </a:bodyPr>
           <a:lstStyle>
@@ -1092,15 +1118,19 @@
               <a:defRPr sz="2800"/>
             </a:lvl9pPr>
           </a:lstStyle>
-          <a:p/>
+          <a:p>
+            <a:endParaRPr/>
+          </a:p>
         </p:txBody>
       </p:sp>
       <p:sp>
         <p:nvSpPr>
           <p:cNvPr id="12" name="Google Shape;12;p2"/>
-          <p:cNvSpPr txBox="1"/>
+          <p:cNvSpPr txBox="1">
+            <a:spLocks noGrp="1"/>
+          </p:cNvSpPr>
           <p:nvPr>
-            <p:ph idx="12" type="sldNum"/>
+            <p:ph type="sldNum" idx="12"/>
           </p:nvPr>
         </p:nvSpPr>
         <p:spPr>
@@ -1113,7 +1143,7 @@
           </a:prstGeom>
         </p:spPr>
         <p:txBody>
-          <a:bodyPr anchorCtr="0" anchor="ctr" bIns="91425" lIns="91425" spcFirstLastPara="1" rIns="91425" wrap="square" tIns="91425">
+          <a:bodyPr spcFirstLastPara="1" wrap="square" lIns="91425" tIns="91425" rIns="91425" bIns="91425" anchor="ctr" anchorCtr="0">
             <a:normAutofit/>
           </a:bodyPr>
           <a:lstStyle>
@@ -1155,7 +1185,7 @@
             </a:lvl9pPr>
           </a:lstStyle>
           <a:p>
-            <a:pPr indent="0" lvl="0" marL="0" rtl="0" algn="r">
+            <a:pPr marL="0" lvl="0" indent="0" algn="r" rtl="0">
               <a:spcBef>
                 <a:spcPts val="0"/>
               </a:spcBef>
@@ -1181,11 +1211,11 @@
 </file>
 
 <file path=ppt/slideLayouts/slideLayout10.xml><?xml version="1.0" encoding="utf-8"?>
-<p:sldLayout xmlns:a="http://schemas.openxmlformats.org/drawingml/2006/main" xmlns:r="http://schemas.openxmlformats.org/officeDocument/2006/relationships" xmlns:mc="http://schemas.openxmlformats.org/markup-compatibility/2006" xmlns:mv="urn:schemas-microsoft-com:mac:vml" xmlns:p="http://schemas.openxmlformats.org/presentationml/2006/main" xmlns:c="http://schemas.openxmlformats.org/drawingml/2006/chart" xmlns:dgm="http://schemas.openxmlformats.org/drawingml/2006/diagram" xmlns:o="urn:schemas-microsoft-com:office:office" xmlns:v="urn:schemas-microsoft-com:vml" xmlns:pvml="urn:schemas-microsoft-com:office:powerpoint" xmlns:com="http://schemas.openxmlformats.org/drawingml/2006/compatibility" xmlns:p14="http://schemas.microsoft.com/office/powerpoint/2010/main" xmlns:p15="http://schemas.microsoft.com/office/powerpoint/2012/main" xmlns:ahyp="http://schemas.microsoft.com/office/drawing/2018/hyperlinkcolor" matchingName="Big number">
+<p:sldLayout xmlns:a="http://schemas.openxmlformats.org/drawingml/2006/main" xmlns:r="http://schemas.openxmlformats.org/officeDocument/2006/relationships" xmlns:p="http://schemas.openxmlformats.org/presentationml/2006/main" matchingName="Big number">
   <p:cSld name="BIG_NUMBER">
     <p:spTree>
       <p:nvGrpSpPr>
-        <p:cNvPr id="44" name="Shape 44"/>
+        <p:cNvPr id="1" name="Shape 44"/>
         <p:cNvGrpSpPr/>
         <p:nvPr/>
       </p:nvGrpSpPr>
@@ -1200,9 +1230,11 @@
       <p:sp>
         <p:nvSpPr>
           <p:cNvPr id="45" name="Google Shape;45;p11"/>
-          <p:cNvSpPr txBox="1"/>
+          <p:cNvSpPr txBox="1">
+            <a:spLocks noGrp="1"/>
+          </p:cNvSpPr>
           <p:nvPr>
-            <p:ph hasCustomPrompt="1" type="title"/>
+            <p:ph type="title" hasCustomPrompt="1"/>
           </p:nvPr>
         </p:nvSpPr>
         <p:spPr>
@@ -1215,7 +1247,7 @@
           </a:prstGeom>
         </p:spPr>
         <p:txBody>
-          <a:bodyPr anchorCtr="0" anchor="b" bIns="91425" lIns="91425" spcFirstLastPara="1" rIns="91425" wrap="square" tIns="91425">
+          <a:bodyPr spcFirstLastPara="1" wrap="square" lIns="91425" tIns="91425" rIns="91425" bIns="91425" anchor="b" anchorCtr="0">
             <a:normAutofit/>
           </a:bodyPr>
           <a:lstStyle>
@@ -1329,9 +1361,11 @@
       <p:sp>
         <p:nvSpPr>
           <p:cNvPr id="46" name="Google Shape;46;p11"/>
-          <p:cNvSpPr txBox="1"/>
+          <p:cNvSpPr txBox="1">
+            <a:spLocks noGrp="1"/>
+          </p:cNvSpPr>
           <p:nvPr>
-            <p:ph idx="1" type="body"/>
+            <p:ph type="body" idx="1"/>
           </p:nvPr>
         </p:nvSpPr>
         <p:spPr>
@@ -1344,11 +1378,11 @@
           </a:prstGeom>
         </p:spPr>
         <p:txBody>
-          <a:bodyPr anchorCtr="0" anchor="t" bIns="91425" lIns="91425" spcFirstLastPara="1" rIns="91425" wrap="square" tIns="91425">
+          <a:bodyPr spcFirstLastPara="1" wrap="square" lIns="91425" tIns="91425" rIns="91425" bIns="91425" anchor="t" anchorCtr="0">
             <a:normAutofit/>
           </a:bodyPr>
           <a:lstStyle>
-            <a:lvl1pPr indent="-342900" lvl="0" marL="457200" algn="ctr">
+            <a:lvl1pPr marL="457200" lvl="0" indent="-342900" algn="ctr">
               <a:spcBef>
                 <a:spcPts val="0"/>
               </a:spcBef>
@@ -1359,7 +1393,7 @@
               <a:buChar char="●"/>
               <a:defRPr/>
             </a:lvl1pPr>
-            <a:lvl2pPr indent="-317500" lvl="1" marL="914400" algn="ctr">
+            <a:lvl2pPr marL="914400" lvl="1" indent="-317500" algn="ctr">
               <a:spcBef>
                 <a:spcPts val="0"/>
               </a:spcBef>
@@ -1370,7 +1404,7 @@
               <a:buChar char="○"/>
               <a:defRPr/>
             </a:lvl2pPr>
-            <a:lvl3pPr indent="-317500" lvl="2" marL="1371600" algn="ctr">
+            <a:lvl3pPr marL="1371600" lvl="2" indent="-317500" algn="ctr">
               <a:spcBef>
                 <a:spcPts val="0"/>
               </a:spcBef>
@@ -1381,7 +1415,7 @@
               <a:buChar char="■"/>
               <a:defRPr/>
             </a:lvl3pPr>
-            <a:lvl4pPr indent="-317500" lvl="3" marL="1828800" algn="ctr">
+            <a:lvl4pPr marL="1828800" lvl="3" indent="-317500" algn="ctr">
               <a:spcBef>
                 <a:spcPts val="0"/>
               </a:spcBef>
@@ -1392,7 +1426,7 @@
               <a:buChar char="●"/>
               <a:defRPr/>
             </a:lvl4pPr>
-            <a:lvl5pPr indent="-317500" lvl="4" marL="2286000" algn="ctr">
+            <a:lvl5pPr marL="2286000" lvl="4" indent="-317500" algn="ctr">
               <a:spcBef>
                 <a:spcPts val="0"/>
               </a:spcBef>
@@ -1403,7 +1437,7 @@
               <a:buChar char="○"/>
               <a:defRPr/>
             </a:lvl5pPr>
-            <a:lvl6pPr indent="-317500" lvl="5" marL="2743200" algn="ctr">
+            <a:lvl6pPr marL="2743200" lvl="5" indent="-317500" algn="ctr">
               <a:spcBef>
                 <a:spcPts val="0"/>
               </a:spcBef>
@@ -1414,7 +1448,7 @@
               <a:buChar char="■"/>
               <a:defRPr/>
             </a:lvl6pPr>
-            <a:lvl7pPr indent="-317500" lvl="6" marL="3200400" algn="ctr">
+            <a:lvl7pPr marL="3200400" lvl="6" indent="-317500" algn="ctr">
               <a:spcBef>
                 <a:spcPts val="0"/>
               </a:spcBef>
@@ -1425,7 +1459,7 @@
               <a:buChar char="●"/>
               <a:defRPr/>
             </a:lvl7pPr>
-            <a:lvl8pPr indent="-317500" lvl="7" marL="3657600" algn="ctr">
+            <a:lvl8pPr marL="3657600" lvl="7" indent="-317500" algn="ctr">
               <a:spcBef>
                 <a:spcPts val="0"/>
               </a:spcBef>
@@ -1436,7 +1470,7 @@
               <a:buChar char="○"/>
               <a:defRPr/>
             </a:lvl8pPr>
-            <a:lvl9pPr indent="-317500" lvl="8" marL="4114800" algn="ctr">
+            <a:lvl9pPr marL="4114800" lvl="8" indent="-317500" algn="ctr">
               <a:spcBef>
                 <a:spcPts val="0"/>
               </a:spcBef>
@@ -1448,15 +1482,19 @@
               <a:defRPr/>
             </a:lvl9pPr>
           </a:lstStyle>
-          <a:p/>
+          <a:p>
+            <a:endParaRPr/>
+          </a:p>
         </p:txBody>
       </p:sp>
       <p:sp>
         <p:nvSpPr>
           <p:cNvPr id="47" name="Google Shape;47;p11"/>
-          <p:cNvSpPr txBox="1"/>
+          <p:cNvSpPr txBox="1">
+            <a:spLocks noGrp="1"/>
+          </p:cNvSpPr>
           <p:nvPr>
-            <p:ph idx="12" type="sldNum"/>
+            <p:ph type="sldNum" idx="12"/>
           </p:nvPr>
         </p:nvSpPr>
         <p:spPr>
@@ -1469,7 +1507,7 @@
           </a:prstGeom>
         </p:spPr>
         <p:txBody>
-          <a:bodyPr anchorCtr="0" anchor="ctr" bIns="91425" lIns="91425" spcFirstLastPara="1" rIns="91425" wrap="square" tIns="91425">
+          <a:bodyPr spcFirstLastPara="1" wrap="square" lIns="91425" tIns="91425" rIns="91425" bIns="91425" anchor="ctr" anchorCtr="0">
             <a:normAutofit/>
           </a:bodyPr>
           <a:lstStyle>
@@ -1511,7 +1549,7 @@
             </a:lvl9pPr>
           </a:lstStyle>
           <a:p>
-            <a:pPr indent="0" lvl="0" marL="0" rtl="0" algn="r">
+            <a:pPr marL="0" lvl="0" indent="0" algn="r" rtl="0">
               <a:spcBef>
                 <a:spcPts val="0"/>
               </a:spcBef>
@@ -1537,11 +1575,11 @@
 </file>
 
 <file path=ppt/slideLayouts/slideLayout11.xml><?xml version="1.0" encoding="utf-8"?>
-<p:sldLayout xmlns:a="http://schemas.openxmlformats.org/drawingml/2006/main" xmlns:r="http://schemas.openxmlformats.org/officeDocument/2006/relationships" xmlns:mc="http://schemas.openxmlformats.org/markup-compatibility/2006" xmlns:mv="urn:schemas-microsoft-com:mac:vml" xmlns:p="http://schemas.openxmlformats.org/presentationml/2006/main" xmlns:c="http://schemas.openxmlformats.org/drawingml/2006/chart" xmlns:dgm="http://schemas.openxmlformats.org/drawingml/2006/diagram" xmlns:o="urn:schemas-microsoft-com:office:office" xmlns:v="urn:schemas-microsoft-com:vml" xmlns:pvml="urn:schemas-microsoft-com:office:powerpoint" xmlns:com="http://schemas.openxmlformats.org/drawingml/2006/compatibility" xmlns:p14="http://schemas.microsoft.com/office/powerpoint/2010/main" xmlns:p15="http://schemas.microsoft.com/office/powerpoint/2012/main" xmlns:ahyp="http://schemas.microsoft.com/office/drawing/2018/hyperlinkcolor" matchingName="Blank" type="blank">
+<p:sldLayout xmlns:a="http://schemas.openxmlformats.org/drawingml/2006/main" xmlns:r="http://schemas.openxmlformats.org/officeDocument/2006/relationships" xmlns:p="http://schemas.openxmlformats.org/presentationml/2006/main" matchingName="Blank" type="blank">
   <p:cSld name="BLANK">
     <p:spTree>
       <p:nvGrpSpPr>
-        <p:cNvPr id="48" name="Shape 48"/>
+        <p:cNvPr id="1" name="Shape 48"/>
         <p:cNvGrpSpPr/>
         <p:nvPr/>
       </p:nvGrpSpPr>
@@ -1556,9 +1594,11 @@
       <p:sp>
         <p:nvSpPr>
           <p:cNvPr id="49" name="Google Shape;49;p12"/>
-          <p:cNvSpPr txBox="1"/>
+          <p:cNvSpPr txBox="1">
+            <a:spLocks noGrp="1"/>
+          </p:cNvSpPr>
           <p:nvPr>
-            <p:ph idx="12" type="sldNum"/>
+            <p:ph type="sldNum" idx="12"/>
           </p:nvPr>
         </p:nvSpPr>
         <p:spPr>
@@ -1571,7 +1611,7 @@
           </a:prstGeom>
         </p:spPr>
         <p:txBody>
-          <a:bodyPr anchorCtr="0" anchor="ctr" bIns="91425" lIns="91425" spcFirstLastPara="1" rIns="91425" wrap="square" tIns="91425">
+          <a:bodyPr spcFirstLastPara="1" wrap="square" lIns="91425" tIns="91425" rIns="91425" bIns="91425" anchor="ctr" anchorCtr="0">
             <a:normAutofit/>
           </a:bodyPr>
           <a:lstStyle>
@@ -1613,7 +1653,7 @@
             </a:lvl9pPr>
           </a:lstStyle>
           <a:p>
-            <a:pPr indent="0" lvl="0" marL="0" rtl="0" algn="r">
+            <a:pPr marL="0" lvl="0" indent="0" algn="r" rtl="0">
               <a:spcBef>
                 <a:spcPts val="0"/>
               </a:spcBef>
@@ -1639,11 +1679,11 @@
 </file>
 
 <file path=ppt/slideLayouts/slideLayout2.xml><?xml version="1.0" encoding="utf-8"?>
-<p:sldLayout xmlns:a="http://schemas.openxmlformats.org/drawingml/2006/main" xmlns:r="http://schemas.openxmlformats.org/officeDocument/2006/relationships" xmlns:mc="http://schemas.openxmlformats.org/markup-compatibility/2006" xmlns:mv="urn:schemas-microsoft-com:mac:vml" xmlns:p="http://schemas.openxmlformats.org/presentationml/2006/main" xmlns:c="http://schemas.openxmlformats.org/drawingml/2006/chart" xmlns:dgm="http://schemas.openxmlformats.org/drawingml/2006/diagram" xmlns:o="urn:schemas-microsoft-com:office:office" xmlns:v="urn:schemas-microsoft-com:vml" xmlns:pvml="urn:schemas-microsoft-com:office:powerpoint" xmlns:com="http://schemas.openxmlformats.org/drawingml/2006/compatibility" xmlns:p14="http://schemas.microsoft.com/office/powerpoint/2010/main" xmlns:p15="http://schemas.microsoft.com/office/powerpoint/2012/main" xmlns:ahyp="http://schemas.microsoft.com/office/drawing/2018/hyperlinkcolor" matchingName="Section header" type="secHead">
+<p:sldLayout xmlns:a="http://schemas.openxmlformats.org/drawingml/2006/main" xmlns:r="http://schemas.openxmlformats.org/officeDocument/2006/relationships" xmlns:p="http://schemas.openxmlformats.org/presentationml/2006/main" matchingName="Section header" type="secHead">
   <p:cSld name="SECTION_HEADER">
     <p:spTree>
       <p:nvGrpSpPr>
-        <p:cNvPr id="13" name="Shape 13"/>
+        <p:cNvPr id="1" name="Shape 13"/>
         <p:cNvGrpSpPr/>
         <p:nvPr/>
       </p:nvGrpSpPr>
@@ -1658,7 +1698,9 @@
       <p:sp>
         <p:nvSpPr>
           <p:cNvPr id="14" name="Google Shape;14;p3"/>
-          <p:cNvSpPr txBox="1"/>
+          <p:cNvSpPr txBox="1">
+            <a:spLocks noGrp="1"/>
+          </p:cNvSpPr>
           <p:nvPr>
             <p:ph type="title"/>
           </p:nvPr>
@@ -1673,7 +1715,7 @@
           </a:prstGeom>
         </p:spPr>
         <p:txBody>
-          <a:bodyPr anchorCtr="0" anchor="ctr" bIns="91425" lIns="91425" spcFirstLastPara="1" rIns="91425" wrap="square" tIns="91425">
+          <a:bodyPr spcFirstLastPara="1" wrap="square" lIns="91425" tIns="91425" rIns="91425" bIns="91425" anchor="ctr" anchorCtr="0">
             <a:normAutofit/>
           </a:bodyPr>
           <a:lstStyle>
@@ -1777,15 +1819,19 @@
               <a:defRPr sz="3600"/>
             </a:lvl9pPr>
           </a:lstStyle>
-          <a:p/>
+          <a:p>
+            <a:endParaRPr/>
+          </a:p>
         </p:txBody>
       </p:sp>
       <p:sp>
         <p:nvSpPr>
           <p:cNvPr id="15" name="Google Shape;15;p3"/>
-          <p:cNvSpPr txBox="1"/>
+          <p:cNvSpPr txBox="1">
+            <a:spLocks noGrp="1"/>
+          </p:cNvSpPr>
           <p:nvPr>
-            <p:ph idx="12" type="sldNum"/>
+            <p:ph type="sldNum" idx="12"/>
           </p:nvPr>
         </p:nvSpPr>
         <p:spPr>
@@ -1798,7 +1844,7 @@
           </a:prstGeom>
         </p:spPr>
         <p:txBody>
-          <a:bodyPr anchorCtr="0" anchor="ctr" bIns="91425" lIns="91425" spcFirstLastPara="1" rIns="91425" wrap="square" tIns="91425">
+          <a:bodyPr spcFirstLastPara="1" wrap="square" lIns="91425" tIns="91425" rIns="91425" bIns="91425" anchor="ctr" anchorCtr="0">
             <a:normAutofit/>
           </a:bodyPr>
           <a:lstStyle>
@@ -1840,7 +1886,7 @@
             </a:lvl9pPr>
           </a:lstStyle>
           <a:p>
-            <a:pPr indent="0" lvl="0" marL="0" rtl="0" algn="r">
+            <a:pPr marL="0" lvl="0" indent="0" algn="r" rtl="0">
               <a:spcBef>
                 <a:spcPts val="0"/>
               </a:spcBef>
@@ -1866,11 +1912,11 @@
 </file>
 
 <file path=ppt/slideLayouts/slideLayout3.xml><?xml version="1.0" encoding="utf-8"?>
-<p:sldLayout xmlns:a="http://schemas.openxmlformats.org/drawingml/2006/main" xmlns:r="http://schemas.openxmlformats.org/officeDocument/2006/relationships" xmlns:mc="http://schemas.openxmlformats.org/markup-compatibility/2006" xmlns:mv="urn:schemas-microsoft-com:mac:vml" xmlns:p="http://schemas.openxmlformats.org/presentationml/2006/main" xmlns:c="http://schemas.openxmlformats.org/drawingml/2006/chart" xmlns:dgm="http://schemas.openxmlformats.org/drawingml/2006/diagram" xmlns:o="urn:schemas-microsoft-com:office:office" xmlns:v="urn:schemas-microsoft-com:vml" xmlns:pvml="urn:schemas-microsoft-com:office:powerpoint" xmlns:com="http://schemas.openxmlformats.org/drawingml/2006/compatibility" xmlns:p14="http://schemas.microsoft.com/office/powerpoint/2010/main" xmlns:p15="http://schemas.microsoft.com/office/powerpoint/2012/main" xmlns:ahyp="http://schemas.microsoft.com/office/drawing/2018/hyperlinkcolor" matchingName="Title and body" type="tx">
+<p:sldLayout xmlns:a="http://schemas.openxmlformats.org/drawingml/2006/main" xmlns:r="http://schemas.openxmlformats.org/officeDocument/2006/relationships" xmlns:p="http://schemas.openxmlformats.org/presentationml/2006/main" matchingName="Title and body" type="tx">
   <p:cSld name="TITLE_AND_BODY">
     <p:spTree>
       <p:nvGrpSpPr>
-        <p:cNvPr id="16" name="Shape 16"/>
+        <p:cNvPr id="1" name="Shape 16"/>
         <p:cNvGrpSpPr/>
         <p:nvPr/>
       </p:nvGrpSpPr>
@@ -1885,7 +1931,9 @@
       <p:sp>
         <p:nvSpPr>
           <p:cNvPr id="17" name="Google Shape;17;p4"/>
-          <p:cNvSpPr txBox="1"/>
+          <p:cNvSpPr txBox="1">
+            <a:spLocks noGrp="1"/>
+          </p:cNvSpPr>
           <p:nvPr>
             <p:ph type="title"/>
           </p:nvPr>
@@ -1900,7 +1948,7 @@
           </a:prstGeom>
         </p:spPr>
         <p:txBody>
-          <a:bodyPr anchorCtr="0" anchor="t" bIns="91425" lIns="91425" spcFirstLastPara="1" rIns="91425" wrap="square" tIns="91425">
+          <a:bodyPr spcFirstLastPara="1" wrap="square" lIns="91425" tIns="91425" rIns="91425" bIns="91425" anchor="t" anchorCtr="0">
             <a:normAutofit/>
           </a:bodyPr>
           <a:lstStyle>
@@ -2004,15 +2052,19 @@
               <a:defRPr/>
             </a:lvl9pPr>
           </a:lstStyle>
-          <a:p/>
+          <a:p>
+            <a:endParaRPr/>
+          </a:p>
         </p:txBody>
       </p:sp>
       <p:sp>
         <p:nvSpPr>
           <p:cNvPr id="18" name="Google Shape;18;p4"/>
-          <p:cNvSpPr txBox="1"/>
+          <p:cNvSpPr txBox="1">
+            <a:spLocks noGrp="1"/>
+          </p:cNvSpPr>
           <p:nvPr>
-            <p:ph idx="1" type="body"/>
+            <p:ph type="body" idx="1"/>
           </p:nvPr>
         </p:nvSpPr>
         <p:spPr>
@@ -2025,11 +2077,11 @@
           </a:prstGeom>
         </p:spPr>
         <p:txBody>
-          <a:bodyPr anchorCtr="0" anchor="t" bIns="91425" lIns="91425" spcFirstLastPara="1" rIns="91425" wrap="square" tIns="91425">
+          <a:bodyPr spcFirstLastPara="1" wrap="square" lIns="91425" tIns="91425" rIns="91425" bIns="91425" anchor="t" anchorCtr="0">
             <a:normAutofit/>
           </a:bodyPr>
           <a:lstStyle>
-            <a:lvl1pPr indent="-342900" lvl="0" marL="457200">
+            <a:lvl1pPr marL="457200" lvl="0" indent="-342900">
               <a:spcBef>
                 <a:spcPts val="0"/>
               </a:spcBef>
@@ -2040,7 +2092,7 @@
               <a:buChar char="●"/>
               <a:defRPr/>
             </a:lvl1pPr>
-            <a:lvl2pPr indent="-317500" lvl="1" marL="914400">
+            <a:lvl2pPr marL="914400" lvl="1" indent="-317500">
               <a:spcBef>
                 <a:spcPts val="0"/>
               </a:spcBef>
@@ -2051,7 +2103,7 @@
               <a:buChar char="○"/>
               <a:defRPr/>
             </a:lvl2pPr>
-            <a:lvl3pPr indent="-317500" lvl="2" marL="1371600">
+            <a:lvl3pPr marL="1371600" lvl="2" indent="-317500">
               <a:spcBef>
                 <a:spcPts val="0"/>
               </a:spcBef>
@@ -2062,7 +2114,7 @@
               <a:buChar char="■"/>
               <a:defRPr/>
             </a:lvl3pPr>
-            <a:lvl4pPr indent="-317500" lvl="3" marL="1828800">
+            <a:lvl4pPr marL="1828800" lvl="3" indent="-317500">
               <a:spcBef>
                 <a:spcPts val="0"/>
               </a:spcBef>
@@ -2073,7 +2125,7 @@
               <a:buChar char="●"/>
               <a:defRPr/>
             </a:lvl4pPr>
-            <a:lvl5pPr indent="-317500" lvl="4" marL="2286000">
+            <a:lvl5pPr marL="2286000" lvl="4" indent="-317500">
               <a:spcBef>
                 <a:spcPts val="0"/>
               </a:spcBef>
@@ -2084,7 +2136,7 @@
               <a:buChar char="○"/>
               <a:defRPr/>
             </a:lvl5pPr>
-            <a:lvl6pPr indent="-317500" lvl="5" marL="2743200">
+            <a:lvl6pPr marL="2743200" lvl="5" indent="-317500">
               <a:spcBef>
                 <a:spcPts val="0"/>
               </a:spcBef>
@@ -2095,7 +2147,7 @@
               <a:buChar char="■"/>
               <a:defRPr/>
             </a:lvl6pPr>
-            <a:lvl7pPr indent="-317500" lvl="6" marL="3200400">
+            <a:lvl7pPr marL="3200400" lvl="6" indent="-317500">
               <a:spcBef>
                 <a:spcPts val="0"/>
               </a:spcBef>
@@ -2106,7 +2158,7 @@
               <a:buChar char="●"/>
               <a:defRPr/>
             </a:lvl7pPr>
-            <a:lvl8pPr indent="-317500" lvl="7" marL="3657600">
+            <a:lvl8pPr marL="3657600" lvl="7" indent="-317500">
               <a:spcBef>
                 <a:spcPts val="0"/>
               </a:spcBef>
@@ -2117,7 +2169,7 @@
               <a:buChar char="○"/>
               <a:defRPr/>
             </a:lvl8pPr>
-            <a:lvl9pPr indent="-317500" lvl="8" marL="4114800">
+            <a:lvl9pPr marL="4114800" lvl="8" indent="-317500">
               <a:spcBef>
                 <a:spcPts val="0"/>
               </a:spcBef>
@@ -2129,15 +2181,19 @@
               <a:defRPr/>
             </a:lvl9pPr>
           </a:lstStyle>
-          <a:p/>
+          <a:p>
+            <a:endParaRPr/>
+          </a:p>
         </p:txBody>
       </p:sp>
       <p:sp>
         <p:nvSpPr>
           <p:cNvPr id="19" name="Google Shape;19;p4"/>
-          <p:cNvSpPr txBox="1"/>
+          <p:cNvSpPr txBox="1">
+            <a:spLocks noGrp="1"/>
+          </p:cNvSpPr>
           <p:nvPr>
-            <p:ph idx="12" type="sldNum"/>
+            <p:ph type="sldNum" idx="12"/>
           </p:nvPr>
         </p:nvSpPr>
         <p:spPr>
@@ -2150,7 +2206,7 @@
           </a:prstGeom>
         </p:spPr>
         <p:txBody>
-          <a:bodyPr anchorCtr="0" anchor="ctr" bIns="91425" lIns="91425" spcFirstLastPara="1" rIns="91425" wrap="square" tIns="91425">
+          <a:bodyPr spcFirstLastPara="1" wrap="square" lIns="91425" tIns="91425" rIns="91425" bIns="91425" anchor="ctr" anchorCtr="0">
             <a:normAutofit/>
           </a:bodyPr>
           <a:lstStyle>
@@ -2192,7 +2248,7 @@
             </a:lvl9pPr>
           </a:lstStyle>
           <a:p>
-            <a:pPr indent="0" lvl="0" marL="0" rtl="0" algn="r">
+            <a:pPr marL="0" lvl="0" indent="0" algn="r" rtl="0">
               <a:spcBef>
                 <a:spcPts val="0"/>
               </a:spcBef>
@@ -2218,11 +2274,11 @@
 </file>
 
 <file path=ppt/slideLayouts/slideLayout4.xml><?xml version="1.0" encoding="utf-8"?>
-<p:sldLayout xmlns:a="http://schemas.openxmlformats.org/drawingml/2006/main" xmlns:r="http://schemas.openxmlformats.org/officeDocument/2006/relationships" xmlns:mc="http://schemas.openxmlformats.org/markup-compatibility/2006" xmlns:mv="urn:schemas-microsoft-com:mac:vml" xmlns:p="http://schemas.openxmlformats.org/presentationml/2006/main" xmlns:c="http://schemas.openxmlformats.org/drawingml/2006/chart" xmlns:dgm="http://schemas.openxmlformats.org/drawingml/2006/diagram" xmlns:o="urn:schemas-microsoft-com:office:office" xmlns:v="urn:schemas-microsoft-com:vml" xmlns:pvml="urn:schemas-microsoft-com:office:powerpoint" xmlns:com="http://schemas.openxmlformats.org/drawingml/2006/compatibility" xmlns:p14="http://schemas.microsoft.com/office/powerpoint/2010/main" xmlns:p15="http://schemas.microsoft.com/office/powerpoint/2012/main" xmlns:ahyp="http://schemas.microsoft.com/office/drawing/2018/hyperlinkcolor" matchingName="Title and two columns" type="twoColTx">
+<p:sldLayout xmlns:a="http://schemas.openxmlformats.org/drawingml/2006/main" xmlns:r="http://schemas.openxmlformats.org/officeDocument/2006/relationships" xmlns:p="http://schemas.openxmlformats.org/presentationml/2006/main" matchingName="Title and two columns" type="twoColTx">
   <p:cSld name="TITLE_AND_TWO_COLUMNS">
     <p:spTree>
       <p:nvGrpSpPr>
-        <p:cNvPr id="20" name="Shape 20"/>
+        <p:cNvPr id="1" name="Shape 20"/>
         <p:cNvGrpSpPr/>
         <p:nvPr/>
       </p:nvGrpSpPr>
@@ -2237,7 +2293,9 @@
       <p:sp>
         <p:nvSpPr>
           <p:cNvPr id="21" name="Google Shape;21;p5"/>
-          <p:cNvSpPr txBox="1"/>
+          <p:cNvSpPr txBox="1">
+            <a:spLocks noGrp="1"/>
+          </p:cNvSpPr>
           <p:nvPr>
             <p:ph type="title"/>
           </p:nvPr>
@@ -2252,7 +2310,7 @@
           </a:prstGeom>
         </p:spPr>
         <p:txBody>
-          <a:bodyPr anchorCtr="0" anchor="t" bIns="91425" lIns="91425" spcFirstLastPara="1" rIns="91425" wrap="square" tIns="91425">
+          <a:bodyPr spcFirstLastPara="1" wrap="square" lIns="91425" tIns="91425" rIns="91425" bIns="91425" anchor="t" anchorCtr="0">
             <a:normAutofit/>
           </a:bodyPr>
           <a:lstStyle>
@@ -2356,15 +2414,19 @@
               <a:defRPr/>
             </a:lvl9pPr>
           </a:lstStyle>
-          <a:p/>
+          <a:p>
+            <a:endParaRPr/>
+          </a:p>
         </p:txBody>
       </p:sp>
       <p:sp>
         <p:nvSpPr>
           <p:cNvPr id="22" name="Google Shape;22;p5"/>
-          <p:cNvSpPr txBox="1"/>
+          <p:cNvSpPr txBox="1">
+            <a:spLocks noGrp="1"/>
+          </p:cNvSpPr>
           <p:nvPr>
-            <p:ph idx="1" type="body"/>
+            <p:ph type="body" idx="1"/>
           </p:nvPr>
         </p:nvSpPr>
         <p:spPr>
@@ -2377,11 +2439,11 @@
           </a:prstGeom>
         </p:spPr>
         <p:txBody>
-          <a:bodyPr anchorCtr="0" anchor="t" bIns="91425" lIns="91425" spcFirstLastPara="1" rIns="91425" wrap="square" tIns="91425">
+          <a:bodyPr spcFirstLastPara="1" wrap="square" lIns="91425" tIns="91425" rIns="91425" bIns="91425" anchor="t" anchorCtr="0">
             <a:normAutofit/>
           </a:bodyPr>
           <a:lstStyle>
-            <a:lvl1pPr indent="-317500" lvl="0" marL="457200">
+            <a:lvl1pPr marL="457200" lvl="0" indent="-317500">
               <a:spcBef>
                 <a:spcPts val="0"/>
               </a:spcBef>
@@ -2392,7 +2454,7 @@
               <a:buChar char="●"/>
               <a:defRPr sz="1400"/>
             </a:lvl1pPr>
-            <a:lvl2pPr indent="-304800" lvl="1" marL="914400">
+            <a:lvl2pPr marL="914400" lvl="1" indent="-304800">
               <a:spcBef>
                 <a:spcPts val="0"/>
               </a:spcBef>
@@ -2403,7 +2465,7 @@
               <a:buChar char="○"/>
               <a:defRPr sz="1200"/>
             </a:lvl2pPr>
-            <a:lvl3pPr indent="-304800" lvl="2" marL="1371600">
+            <a:lvl3pPr marL="1371600" lvl="2" indent="-304800">
               <a:spcBef>
                 <a:spcPts val="0"/>
               </a:spcBef>
@@ -2414,7 +2476,7 @@
               <a:buChar char="■"/>
               <a:defRPr sz="1200"/>
             </a:lvl3pPr>
-            <a:lvl4pPr indent="-304800" lvl="3" marL="1828800">
+            <a:lvl4pPr marL="1828800" lvl="3" indent="-304800">
               <a:spcBef>
                 <a:spcPts val="0"/>
               </a:spcBef>
@@ -2425,7 +2487,7 @@
               <a:buChar char="●"/>
               <a:defRPr sz="1200"/>
             </a:lvl4pPr>
-            <a:lvl5pPr indent="-304800" lvl="4" marL="2286000">
+            <a:lvl5pPr marL="2286000" lvl="4" indent="-304800">
               <a:spcBef>
                 <a:spcPts val="0"/>
               </a:spcBef>
@@ -2436,7 +2498,7 @@
               <a:buChar char="○"/>
               <a:defRPr sz="1200"/>
             </a:lvl5pPr>
-            <a:lvl6pPr indent="-304800" lvl="5" marL="2743200">
+            <a:lvl6pPr marL="2743200" lvl="5" indent="-304800">
               <a:spcBef>
                 <a:spcPts val="0"/>
               </a:spcBef>
@@ -2447,7 +2509,7 @@
               <a:buChar char="■"/>
               <a:defRPr sz="1200"/>
             </a:lvl6pPr>
-            <a:lvl7pPr indent="-304800" lvl="6" marL="3200400">
+            <a:lvl7pPr marL="3200400" lvl="6" indent="-304800">
               <a:spcBef>
                 <a:spcPts val="0"/>
               </a:spcBef>
@@ -2458,7 +2520,7 @@
               <a:buChar char="●"/>
               <a:defRPr sz="1200"/>
             </a:lvl7pPr>
-            <a:lvl8pPr indent="-304800" lvl="7" marL="3657600">
+            <a:lvl8pPr marL="3657600" lvl="7" indent="-304800">
               <a:spcBef>
                 <a:spcPts val="0"/>
               </a:spcBef>
@@ -2469,7 +2531,7 @@
               <a:buChar char="○"/>
               <a:defRPr sz="1200"/>
             </a:lvl8pPr>
-            <a:lvl9pPr indent="-304800" lvl="8" marL="4114800">
+            <a:lvl9pPr marL="4114800" lvl="8" indent="-304800">
               <a:spcBef>
                 <a:spcPts val="0"/>
               </a:spcBef>
@@ -2481,15 +2543,19 @@
               <a:defRPr sz="1200"/>
             </a:lvl9pPr>
           </a:lstStyle>
-          <a:p/>
+          <a:p>
+            <a:endParaRPr/>
+          </a:p>
         </p:txBody>
       </p:sp>
       <p:sp>
         <p:nvSpPr>
           <p:cNvPr id="23" name="Google Shape;23;p5"/>
-          <p:cNvSpPr txBox="1"/>
+          <p:cNvSpPr txBox="1">
+            <a:spLocks noGrp="1"/>
+          </p:cNvSpPr>
           <p:nvPr>
-            <p:ph idx="2" type="body"/>
+            <p:ph type="body" idx="2"/>
           </p:nvPr>
         </p:nvSpPr>
         <p:spPr>
@@ -2502,11 +2568,11 @@
           </a:prstGeom>
         </p:spPr>
         <p:txBody>
-          <a:bodyPr anchorCtr="0" anchor="t" bIns="91425" lIns="91425" spcFirstLastPara="1" rIns="91425" wrap="square" tIns="91425">
+          <a:bodyPr spcFirstLastPara="1" wrap="square" lIns="91425" tIns="91425" rIns="91425" bIns="91425" anchor="t" anchorCtr="0">
             <a:normAutofit/>
           </a:bodyPr>
           <a:lstStyle>
-            <a:lvl1pPr indent="-317500" lvl="0" marL="457200">
+            <a:lvl1pPr marL="457200" lvl="0" indent="-317500">
               <a:spcBef>
                 <a:spcPts val="0"/>
               </a:spcBef>
@@ -2517,7 +2583,7 @@
               <a:buChar char="●"/>
               <a:defRPr sz="1400"/>
             </a:lvl1pPr>
-            <a:lvl2pPr indent="-304800" lvl="1" marL="914400">
+            <a:lvl2pPr marL="914400" lvl="1" indent="-304800">
               <a:spcBef>
                 <a:spcPts val="0"/>
               </a:spcBef>
@@ -2528,7 +2594,7 @@
               <a:buChar char="○"/>
               <a:defRPr sz="1200"/>
             </a:lvl2pPr>
-            <a:lvl3pPr indent="-304800" lvl="2" marL="1371600">
+            <a:lvl3pPr marL="1371600" lvl="2" indent="-304800">
               <a:spcBef>
                 <a:spcPts val="0"/>
               </a:spcBef>
@@ -2539,7 +2605,7 @@
               <a:buChar char="■"/>
               <a:defRPr sz="1200"/>
             </a:lvl3pPr>
-            <a:lvl4pPr indent="-304800" lvl="3" marL="1828800">
+            <a:lvl4pPr marL="1828800" lvl="3" indent="-304800">
               <a:spcBef>
                 <a:spcPts val="0"/>
               </a:spcBef>
@@ -2550,7 +2616,7 @@
               <a:buChar char="●"/>
               <a:defRPr sz="1200"/>
             </a:lvl4pPr>
-            <a:lvl5pPr indent="-304800" lvl="4" marL="2286000">
+            <a:lvl5pPr marL="2286000" lvl="4" indent="-304800">
               <a:spcBef>
                 <a:spcPts val="0"/>
               </a:spcBef>
@@ -2561,7 +2627,7 @@
               <a:buChar char="○"/>
               <a:defRPr sz="1200"/>
             </a:lvl5pPr>
-            <a:lvl6pPr indent="-304800" lvl="5" marL="2743200">
+            <a:lvl6pPr marL="2743200" lvl="5" indent="-304800">
               <a:spcBef>
                 <a:spcPts val="0"/>
               </a:spcBef>
@@ -2572,7 +2638,7 @@
               <a:buChar char="■"/>
               <a:defRPr sz="1200"/>
             </a:lvl6pPr>
-            <a:lvl7pPr indent="-304800" lvl="6" marL="3200400">
+            <a:lvl7pPr marL="3200400" lvl="6" indent="-304800">
               <a:spcBef>
                 <a:spcPts val="0"/>
               </a:spcBef>
@@ -2583,7 +2649,7 @@
               <a:buChar char="●"/>
               <a:defRPr sz="1200"/>
             </a:lvl7pPr>
-            <a:lvl8pPr indent="-304800" lvl="7" marL="3657600">
+            <a:lvl8pPr marL="3657600" lvl="7" indent="-304800">
               <a:spcBef>
                 <a:spcPts val="0"/>
               </a:spcBef>
@@ -2594,7 +2660,7 @@
               <a:buChar char="○"/>
               <a:defRPr sz="1200"/>
             </a:lvl8pPr>
-            <a:lvl9pPr indent="-304800" lvl="8" marL="4114800">
+            <a:lvl9pPr marL="4114800" lvl="8" indent="-304800">
               <a:spcBef>
                 <a:spcPts val="0"/>
               </a:spcBef>
@@ -2606,15 +2672,19 @@
               <a:defRPr sz="1200"/>
             </a:lvl9pPr>
           </a:lstStyle>
-          <a:p/>
+          <a:p>
+            <a:endParaRPr/>
+          </a:p>
         </p:txBody>
       </p:sp>
       <p:sp>
         <p:nvSpPr>
           <p:cNvPr id="24" name="Google Shape;24;p5"/>
-          <p:cNvSpPr txBox="1"/>
+          <p:cNvSpPr txBox="1">
+            <a:spLocks noGrp="1"/>
+          </p:cNvSpPr>
           <p:nvPr>
-            <p:ph idx="12" type="sldNum"/>
+            <p:ph type="sldNum" idx="12"/>
           </p:nvPr>
         </p:nvSpPr>
         <p:spPr>
@@ -2627,7 +2697,7 @@
           </a:prstGeom>
         </p:spPr>
         <p:txBody>
-          <a:bodyPr anchorCtr="0" anchor="ctr" bIns="91425" lIns="91425" spcFirstLastPara="1" rIns="91425" wrap="square" tIns="91425">
+          <a:bodyPr spcFirstLastPara="1" wrap="square" lIns="91425" tIns="91425" rIns="91425" bIns="91425" anchor="ctr" anchorCtr="0">
             <a:normAutofit/>
           </a:bodyPr>
           <a:lstStyle>
@@ -2669,7 +2739,7 @@
             </a:lvl9pPr>
           </a:lstStyle>
           <a:p>
-            <a:pPr indent="0" lvl="0" marL="0" rtl="0" algn="r">
+            <a:pPr marL="0" lvl="0" indent="0" algn="r" rtl="0">
               <a:spcBef>
                 <a:spcPts val="0"/>
               </a:spcBef>
@@ -2695,11 +2765,11 @@
 </file>
 
 <file path=ppt/slideLayouts/slideLayout5.xml><?xml version="1.0" encoding="utf-8"?>
-<p:sldLayout xmlns:a="http://schemas.openxmlformats.org/drawingml/2006/main" xmlns:r="http://schemas.openxmlformats.org/officeDocument/2006/relationships" xmlns:mc="http://schemas.openxmlformats.org/markup-compatibility/2006" xmlns:mv="urn:schemas-microsoft-com:mac:vml" xmlns:p="http://schemas.openxmlformats.org/presentationml/2006/main" xmlns:c="http://schemas.openxmlformats.org/drawingml/2006/chart" xmlns:dgm="http://schemas.openxmlformats.org/drawingml/2006/diagram" xmlns:o="urn:schemas-microsoft-com:office:office" xmlns:v="urn:schemas-microsoft-com:vml" xmlns:pvml="urn:schemas-microsoft-com:office:powerpoint" xmlns:com="http://schemas.openxmlformats.org/drawingml/2006/compatibility" xmlns:p14="http://schemas.microsoft.com/office/powerpoint/2010/main" xmlns:p15="http://schemas.microsoft.com/office/powerpoint/2012/main" xmlns:ahyp="http://schemas.microsoft.com/office/drawing/2018/hyperlinkcolor" matchingName="Title only" type="titleOnly">
+<p:sldLayout xmlns:a="http://schemas.openxmlformats.org/drawingml/2006/main" xmlns:r="http://schemas.openxmlformats.org/officeDocument/2006/relationships" xmlns:p="http://schemas.openxmlformats.org/presentationml/2006/main" matchingName="Title only" type="titleOnly">
   <p:cSld name="TITLE_ONLY">
     <p:spTree>
       <p:nvGrpSpPr>
-        <p:cNvPr id="25" name="Shape 25"/>
+        <p:cNvPr id="1" name="Shape 25"/>
         <p:cNvGrpSpPr/>
         <p:nvPr/>
       </p:nvGrpSpPr>
@@ -2714,7 +2784,9 @@
       <p:sp>
         <p:nvSpPr>
           <p:cNvPr id="26" name="Google Shape;26;p6"/>
-          <p:cNvSpPr txBox="1"/>
+          <p:cNvSpPr txBox="1">
+            <a:spLocks noGrp="1"/>
+          </p:cNvSpPr>
           <p:nvPr>
             <p:ph type="title"/>
           </p:nvPr>
@@ -2729,7 +2801,7 @@
           </a:prstGeom>
         </p:spPr>
         <p:txBody>
-          <a:bodyPr anchorCtr="0" anchor="t" bIns="91425" lIns="91425" spcFirstLastPara="1" rIns="91425" wrap="square" tIns="91425">
+          <a:bodyPr spcFirstLastPara="1" wrap="square" lIns="91425" tIns="91425" rIns="91425" bIns="91425" anchor="t" anchorCtr="0">
             <a:normAutofit/>
           </a:bodyPr>
           <a:lstStyle>
@@ -2833,15 +2905,19 @@
               <a:defRPr/>
             </a:lvl9pPr>
           </a:lstStyle>
-          <a:p/>
+          <a:p>
+            <a:endParaRPr/>
+          </a:p>
         </p:txBody>
       </p:sp>
       <p:sp>
         <p:nvSpPr>
           <p:cNvPr id="27" name="Google Shape;27;p6"/>
-          <p:cNvSpPr txBox="1"/>
+          <p:cNvSpPr txBox="1">
+            <a:spLocks noGrp="1"/>
+          </p:cNvSpPr>
           <p:nvPr>
-            <p:ph idx="12" type="sldNum"/>
+            <p:ph type="sldNum" idx="12"/>
           </p:nvPr>
         </p:nvSpPr>
         <p:spPr>
@@ -2854,7 +2930,7 @@
           </a:prstGeom>
         </p:spPr>
         <p:txBody>
-          <a:bodyPr anchorCtr="0" anchor="ctr" bIns="91425" lIns="91425" spcFirstLastPara="1" rIns="91425" wrap="square" tIns="91425">
+          <a:bodyPr spcFirstLastPara="1" wrap="square" lIns="91425" tIns="91425" rIns="91425" bIns="91425" anchor="ctr" anchorCtr="0">
             <a:normAutofit/>
           </a:bodyPr>
           <a:lstStyle>
@@ -2896,7 +2972,7 @@
             </a:lvl9pPr>
           </a:lstStyle>
           <a:p>
-            <a:pPr indent="0" lvl="0" marL="0" rtl="0" algn="r">
+            <a:pPr marL="0" lvl="0" indent="0" algn="r" rtl="0">
               <a:spcBef>
                 <a:spcPts val="0"/>
               </a:spcBef>
@@ -2922,11 +2998,11 @@
 </file>
 
 <file path=ppt/slideLayouts/slideLayout6.xml><?xml version="1.0" encoding="utf-8"?>
-<p:sldLayout xmlns:a="http://schemas.openxmlformats.org/drawingml/2006/main" xmlns:r="http://schemas.openxmlformats.org/officeDocument/2006/relationships" xmlns:mc="http://schemas.openxmlformats.org/markup-compatibility/2006" xmlns:mv="urn:schemas-microsoft-com:mac:vml" xmlns:p="http://schemas.openxmlformats.org/presentationml/2006/main" xmlns:c="http://schemas.openxmlformats.org/drawingml/2006/chart" xmlns:dgm="http://schemas.openxmlformats.org/drawingml/2006/diagram" xmlns:o="urn:schemas-microsoft-com:office:office" xmlns:v="urn:schemas-microsoft-com:vml" xmlns:pvml="urn:schemas-microsoft-com:office:powerpoint" xmlns:com="http://schemas.openxmlformats.org/drawingml/2006/compatibility" xmlns:p14="http://schemas.microsoft.com/office/powerpoint/2010/main" xmlns:p15="http://schemas.microsoft.com/office/powerpoint/2012/main" xmlns:ahyp="http://schemas.microsoft.com/office/drawing/2018/hyperlinkcolor" matchingName="One column text">
+<p:sldLayout xmlns:a="http://schemas.openxmlformats.org/drawingml/2006/main" xmlns:r="http://schemas.openxmlformats.org/officeDocument/2006/relationships" xmlns:p="http://schemas.openxmlformats.org/presentationml/2006/main" matchingName="One column text">
   <p:cSld name="ONE_COLUMN_TEXT">
     <p:spTree>
       <p:nvGrpSpPr>
-        <p:cNvPr id="28" name="Shape 28"/>
+        <p:cNvPr id="1" name="Shape 28"/>
         <p:cNvGrpSpPr/>
         <p:nvPr/>
       </p:nvGrpSpPr>
@@ -2941,7 +3017,9 @@
       <p:sp>
         <p:nvSpPr>
           <p:cNvPr id="29" name="Google Shape;29;p7"/>
-          <p:cNvSpPr txBox="1"/>
+          <p:cNvSpPr txBox="1">
+            <a:spLocks noGrp="1"/>
+          </p:cNvSpPr>
           <p:nvPr>
             <p:ph type="title"/>
           </p:nvPr>
@@ -2956,7 +3034,7 @@
           </a:prstGeom>
         </p:spPr>
         <p:txBody>
-          <a:bodyPr anchorCtr="0" anchor="b" bIns="91425" lIns="91425" spcFirstLastPara="1" rIns="91425" wrap="square" tIns="91425">
+          <a:bodyPr spcFirstLastPara="1" wrap="square" lIns="91425" tIns="91425" rIns="91425" bIns="91425" anchor="b" anchorCtr="0">
             <a:normAutofit/>
           </a:bodyPr>
           <a:lstStyle>
@@ -3060,15 +3138,19 @@
               <a:defRPr sz="2400"/>
             </a:lvl9pPr>
           </a:lstStyle>
-          <a:p/>
+          <a:p>
+            <a:endParaRPr/>
+          </a:p>
         </p:txBody>
       </p:sp>
       <p:sp>
         <p:nvSpPr>
           <p:cNvPr id="30" name="Google Shape;30;p7"/>
-          <p:cNvSpPr txBox="1"/>
+          <p:cNvSpPr txBox="1">
+            <a:spLocks noGrp="1"/>
+          </p:cNvSpPr>
           <p:nvPr>
-            <p:ph idx="1" type="body"/>
+            <p:ph type="body" idx="1"/>
           </p:nvPr>
         </p:nvSpPr>
         <p:spPr>
@@ -3081,11 +3163,11 @@
           </a:prstGeom>
         </p:spPr>
         <p:txBody>
-          <a:bodyPr anchorCtr="0" anchor="t" bIns="91425" lIns="91425" spcFirstLastPara="1" rIns="91425" wrap="square" tIns="91425">
+          <a:bodyPr spcFirstLastPara="1" wrap="square" lIns="91425" tIns="91425" rIns="91425" bIns="91425" anchor="t" anchorCtr="0">
             <a:normAutofit/>
           </a:bodyPr>
           <a:lstStyle>
-            <a:lvl1pPr indent="-304800" lvl="0" marL="457200">
+            <a:lvl1pPr marL="457200" lvl="0" indent="-304800">
               <a:spcBef>
                 <a:spcPts val="0"/>
               </a:spcBef>
@@ -3096,7 +3178,7 @@
               <a:buChar char="●"/>
               <a:defRPr sz="1200"/>
             </a:lvl1pPr>
-            <a:lvl2pPr indent="-304800" lvl="1" marL="914400">
+            <a:lvl2pPr marL="914400" lvl="1" indent="-304800">
               <a:spcBef>
                 <a:spcPts val="0"/>
               </a:spcBef>
@@ -3107,7 +3189,7 @@
               <a:buChar char="○"/>
               <a:defRPr sz="1200"/>
             </a:lvl2pPr>
-            <a:lvl3pPr indent="-304800" lvl="2" marL="1371600">
+            <a:lvl3pPr marL="1371600" lvl="2" indent="-304800">
               <a:spcBef>
                 <a:spcPts val="0"/>
               </a:spcBef>
@@ -3118,7 +3200,7 @@
               <a:buChar char="■"/>
               <a:defRPr sz="1200"/>
             </a:lvl3pPr>
-            <a:lvl4pPr indent="-304800" lvl="3" marL="1828800">
+            <a:lvl4pPr marL="1828800" lvl="3" indent="-304800">
               <a:spcBef>
                 <a:spcPts val="0"/>
               </a:spcBef>
@@ -3129,7 +3211,7 @@
               <a:buChar char="●"/>
               <a:defRPr sz="1200"/>
             </a:lvl4pPr>
-            <a:lvl5pPr indent="-304800" lvl="4" marL="2286000">
+            <a:lvl5pPr marL="2286000" lvl="4" indent="-304800">
               <a:spcBef>
                 <a:spcPts val="0"/>
               </a:spcBef>
@@ -3140,7 +3222,7 @@
               <a:buChar char="○"/>
               <a:defRPr sz="1200"/>
             </a:lvl5pPr>
-            <a:lvl6pPr indent="-304800" lvl="5" marL="2743200">
+            <a:lvl6pPr marL="2743200" lvl="5" indent="-304800">
               <a:spcBef>
                 <a:spcPts val="0"/>
               </a:spcBef>
@@ -3151,7 +3233,7 @@
               <a:buChar char="■"/>
               <a:defRPr sz="1200"/>
             </a:lvl6pPr>
-            <a:lvl7pPr indent="-304800" lvl="6" marL="3200400">
+            <a:lvl7pPr marL="3200400" lvl="6" indent="-304800">
               <a:spcBef>
                 <a:spcPts val="0"/>
               </a:spcBef>
@@ -3162,7 +3244,7 @@
               <a:buChar char="●"/>
               <a:defRPr sz="1200"/>
             </a:lvl7pPr>
-            <a:lvl8pPr indent="-304800" lvl="7" marL="3657600">
+            <a:lvl8pPr marL="3657600" lvl="7" indent="-304800">
               <a:spcBef>
                 <a:spcPts val="0"/>
               </a:spcBef>
@@ -3173,7 +3255,7 @@
               <a:buChar char="○"/>
               <a:defRPr sz="1200"/>
             </a:lvl8pPr>
-            <a:lvl9pPr indent="-304800" lvl="8" marL="4114800">
+            <a:lvl9pPr marL="4114800" lvl="8" indent="-304800">
               <a:spcBef>
                 <a:spcPts val="0"/>
               </a:spcBef>
@@ -3185,15 +3267,19 @@
               <a:defRPr sz="1200"/>
             </a:lvl9pPr>
           </a:lstStyle>
-          <a:p/>
+          <a:p>
+            <a:endParaRPr/>
+          </a:p>
         </p:txBody>
       </p:sp>
       <p:sp>
         <p:nvSpPr>
           <p:cNvPr id="31" name="Google Shape;31;p7"/>
-          <p:cNvSpPr txBox="1"/>
+          <p:cNvSpPr txBox="1">
+            <a:spLocks noGrp="1"/>
+          </p:cNvSpPr>
           <p:nvPr>
-            <p:ph idx="12" type="sldNum"/>
+            <p:ph type="sldNum" idx="12"/>
           </p:nvPr>
         </p:nvSpPr>
         <p:spPr>
@@ -3206,7 +3292,7 @@
           </a:prstGeom>
         </p:spPr>
         <p:txBody>
-          <a:bodyPr anchorCtr="0" anchor="ctr" bIns="91425" lIns="91425" spcFirstLastPara="1" rIns="91425" wrap="square" tIns="91425">
+          <a:bodyPr spcFirstLastPara="1" wrap="square" lIns="91425" tIns="91425" rIns="91425" bIns="91425" anchor="ctr" anchorCtr="0">
             <a:normAutofit/>
           </a:bodyPr>
           <a:lstStyle>
@@ -3248,7 +3334,7 @@
             </a:lvl9pPr>
           </a:lstStyle>
           <a:p>
-            <a:pPr indent="0" lvl="0" marL="0" rtl="0" algn="r">
+            <a:pPr marL="0" lvl="0" indent="0" algn="r" rtl="0">
               <a:spcBef>
                 <a:spcPts val="0"/>
               </a:spcBef>
@@ -3274,11 +3360,11 @@
 </file>
 
 <file path=ppt/slideLayouts/slideLayout7.xml><?xml version="1.0" encoding="utf-8"?>
-<p:sldLayout xmlns:a="http://schemas.openxmlformats.org/drawingml/2006/main" xmlns:r="http://schemas.openxmlformats.org/officeDocument/2006/relationships" xmlns:mc="http://schemas.openxmlformats.org/markup-compatibility/2006" xmlns:mv="urn:schemas-microsoft-com:mac:vml" xmlns:p="http://schemas.openxmlformats.org/presentationml/2006/main" xmlns:c="http://schemas.openxmlformats.org/drawingml/2006/chart" xmlns:dgm="http://schemas.openxmlformats.org/drawingml/2006/diagram" xmlns:o="urn:schemas-microsoft-com:office:office" xmlns:v="urn:schemas-microsoft-com:vml" xmlns:pvml="urn:schemas-microsoft-com:office:powerpoint" xmlns:com="http://schemas.openxmlformats.org/drawingml/2006/compatibility" xmlns:p14="http://schemas.microsoft.com/office/powerpoint/2010/main" xmlns:p15="http://schemas.microsoft.com/office/powerpoint/2012/main" xmlns:ahyp="http://schemas.microsoft.com/office/drawing/2018/hyperlinkcolor" matchingName="Main point">
+<p:sldLayout xmlns:a="http://schemas.openxmlformats.org/drawingml/2006/main" xmlns:r="http://schemas.openxmlformats.org/officeDocument/2006/relationships" xmlns:p="http://schemas.openxmlformats.org/presentationml/2006/main" matchingName="Main point">
   <p:cSld name="MAIN_POINT">
     <p:spTree>
       <p:nvGrpSpPr>
-        <p:cNvPr id="32" name="Shape 32"/>
+        <p:cNvPr id="1" name="Shape 32"/>
         <p:cNvGrpSpPr/>
         <p:nvPr/>
       </p:nvGrpSpPr>
@@ -3293,7 +3379,9 @@
       <p:sp>
         <p:nvSpPr>
           <p:cNvPr id="33" name="Google Shape;33;p8"/>
-          <p:cNvSpPr txBox="1"/>
+          <p:cNvSpPr txBox="1">
+            <a:spLocks noGrp="1"/>
+          </p:cNvSpPr>
           <p:nvPr>
             <p:ph type="title"/>
           </p:nvPr>
@@ -3308,7 +3396,7 @@
           </a:prstGeom>
         </p:spPr>
         <p:txBody>
-          <a:bodyPr anchorCtr="0" anchor="ctr" bIns="91425" lIns="91425" spcFirstLastPara="1" rIns="91425" wrap="square" tIns="91425">
+          <a:bodyPr spcFirstLastPara="1" wrap="square" lIns="91425" tIns="91425" rIns="91425" bIns="91425" anchor="ctr" anchorCtr="0">
             <a:normAutofit/>
           </a:bodyPr>
           <a:lstStyle>
@@ -3412,15 +3500,19 @@
               <a:defRPr sz="4800"/>
             </a:lvl9pPr>
           </a:lstStyle>
-          <a:p/>
+          <a:p>
+            <a:endParaRPr/>
+          </a:p>
         </p:txBody>
       </p:sp>
       <p:sp>
         <p:nvSpPr>
           <p:cNvPr id="34" name="Google Shape;34;p8"/>
-          <p:cNvSpPr txBox="1"/>
+          <p:cNvSpPr txBox="1">
+            <a:spLocks noGrp="1"/>
+          </p:cNvSpPr>
           <p:nvPr>
-            <p:ph idx="12" type="sldNum"/>
+            <p:ph type="sldNum" idx="12"/>
           </p:nvPr>
         </p:nvSpPr>
         <p:spPr>
@@ -3433,7 +3525,7 @@
           </a:prstGeom>
         </p:spPr>
         <p:txBody>
-          <a:bodyPr anchorCtr="0" anchor="ctr" bIns="91425" lIns="91425" spcFirstLastPara="1" rIns="91425" wrap="square" tIns="91425">
+          <a:bodyPr spcFirstLastPara="1" wrap="square" lIns="91425" tIns="91425" rIns="91425" bIns="91425" anchor="ctr" anchorCtr="0">
             <a:normAutofit/>
           </a:bodyPr>
           <a:lstStyle>
@@ -3475,7 +3567,7 @@
             </a:lvl9pPr>
           </a:lstStyle>
           <a:p>
-            <a:pPr indent="0" lvl="0" marL="0" rtl="0" algn="r">
+            <a:pPr marL="0" lvl="0" indent="0" algn="r" rtl="0">
               <a:spcBef>
                 <a:spcPts val="0"/>
               </a:spcBef>
@@ -3501,11 +3593,11 @@
 </file>
 
 <file path=ppt/slideLayouts/slideLayout8.xml><?xml version="1.0" encoding="utf-8"?>
-<p:sldLayout xmlns:a="http://schemas.openxmlformats.org/drawingml/2006/main" xmlns:r="http://schemas.openxmlformats.org/officeDocument/2006/relationships" xmlns:mc="http://schemas.openxmlformats.org/markup-compatibility/2006" xmlns:mv="urn:schemas-microsoft-com:mac:vml" xmlns:p="http://schemas.openxmlformats.org/presentationml/2006/main" xmlns:c="http://schemas.openxmlformats.org/drawingml/2006/chart" xmlns:dgm="http://schemas.openxmlformats.org/drawingml/2006/diagram" xmlns:o="urn:schemas-microsoft-com:office:office" xmlns:v="urn:schemas-microsoft-com:vml" xmlns:pvml="urn:schemas-microsoft-com:office:powerpoint" xmlns:com="http://schemas.openxmlformats.org/drawingml/2006/compatibility" xmlns:p14="http://schemas.microsoft.com/office/powerpoint/2010/main" xmlns:p15="http://schemas.microsoft.com/office/powerpoint/2012/main" xmlns:ahyp="http://schemas.microsoft.com/office/drawing/2018/hyperlinkcolor" matchingName="Section title and description">
+<p:sldLayout xmlns:a="http://schemas.openxmlformats.org/drawingml/2006/main" xmlns:r="http://schemas.openxmlformats.org/officeDocument/2006/relationships" xmlns:p="http://schemas.openxmlformats.org/presentationml/2006/main" matchingName="Section title and description">
   <p:cSld name="SECTION_TITLE_AND_DESCRIPTION">
     <p:spTree>
       <p:nvGrpSpPr>
-        <p:cNvPr id="35" name="Shape 35"/>
+        <p:cNvPr id="1" name="Shape 35"/>
         <p:cNvGrpSpPr/>
         <p:nvPr/>
       </p:nvGrpSpPr>
@@ -3539,12 +3631,12 @@
           </a:ln>
         </p:spPr>
         <p:txBody>
-          <a:bodyPr anchorCtr="0" anchor="ctr" bIns="91425" lIns="91425" spcFirstLastPara="1" rIns="91425" wrap="square" tIns="91425">
+          <a:bodyPr spcFirstLastPara="1" wrap="square" lIns="91425" tIns="91425" rIns="91425" bIns="91425" anchor="ctr" anchorCtr="0">
             <a:noAutofit/>
           </a:bodyPr>
           <a:lstStyle/>
           <a:p>
-            <a:pPr indent="0" lvl="0" marL="0" rtl="0" algn="l">
+            <a:pPr marL="0" lvl="0" indent="0" algn="l" rtl="0">
               <a:spcBef>
                 <a:spcPts val="0"/>
               </a:spcBef>
@@ -3553,9 +3645,6 @@
               </a:spcAft>
               <a:buNone/>
             </a:pPr>
-            <a:r>
-              <a:t/>
-            </a:r>
             <a:endParaRPr/>
           </a:p>
         </p:txBody>
@@ -3563,7 +3652,9 @@
       <p:sp>
         <p:nvSpPr>
           <p:cNvPr id="37" name="Google Shape;37;p9"/>
-          <p:cNvSpPr txBox="1"/>
+          <p:cNvSpPr txBox="1">
+            <a:spLocks noGrp="1"/>
+          </p:cNvSpPr>
           <p:nvPr>
             <p:ph type="title"/>
           </p:nvPr>
@@ -3578,7 +3669,7 @@
           </a:prstGeom>
         </p:spPr>
         <p:txBody>
-          <a:bodyPr anchorCtr="0" anchor="b" bIns="91425" lIns="91425" spcFirstLastPara="1" rIns="91425" wrap="square" tIns="91425">
+          <a:bodyPr spcFirstLastPara="1" wrap="square" lIns="91425" tIns="91425" rIns="91425" bIns="91425" anchor="b" anchorCtr="0">
             <a:normAutofit/>
           </a:bodyPr>
           <a:lstStyle>
@@ -3682,15 +3773,19 @@
               <a:defRPr sz="4200"/>
             </a:lvl9pPr>
           </a:lstStyle>
-          <a:p/>
+          <a:p>
+            <a:endParaRPr/>
+          </a:p>
         </p:txBody>
       </p:sp>
       <p:sp>
         <p:nvSpPr>
           <p:cNvPr id="38" name="Google Shape;38;p9"/>
-          <p:cNvSpPr txBox="1"/>
+          <p:cNvSpPr txBox="1">
+            <a:spLocks noGrp="1"/>
+          </p:cNvSpPr>
           <p:nvPr>
-            <p:ph idx="1" type="subTitle"/>
+            <p:ph type="subTitle" idx="1"/>
           </p:nvPr>
         </p:nvSpPr>
         <p:spPr>
@@ -3703,7 +3798,7 @@
           </a:prstGeom>
         </p:spPr>
         <p:txBody>
-          <a:bodyPr anchorCtr="0" anchor="t" bIns="91425" lIns="91425" spcFirstLastPara="1" rIns="91425" wrap="square" tIns="91425">
+          <a:bodyPr spcFirstLastPara="1" wrap="square" lIns="91425" tIns="91425" rIns="91425" bIns="91425" anchor="t" anchorCtr="0">
             <a:normAutofit/>
           </a:bodyPr>
           <a:lstStyle>
@@ -3834,15 +3929,19 @@
               <a:defRPr sz="2100"/>
             </a:lvl9pPr>
           </a:lstStyle>
-          <a:p/>
+          <a:p>
+            <a:endParaRPr/>
+          </a:p>
         </p:txBody>
       </p:sp>
       <p:sp>
         <p:nvSpPr>
           <p:cNvPr id="39" name="Google Shape;39;p9"/>
-          <p:cNvSpPr txBox="1"/>
+          <p:cNvSpPr txBox="1">
+            <a:spLocks noGrp="1"/>
+          </p:cNvSpPr>
           <p:nvPr>
-            <p:ph idx="2" type="body"/>
+            <p:ph type="body" idx="2"/>
           </p:nvPr>
         </p:nvSpPr>
         <p:spPr>
@@ -3855,11 +3954,11 @@
           </a:prstGeom>
         </p:spPr>
         <p:txBody>
-          <a:bodyPr anchorCtr="0" anchor="ctr" bIns="91425" lIns="91425" spcFirstLastPara="1" rIns="91425" wrap="square" tIns="91425">
+          <a:bodyPr spcFirstLastPara="1" wrap="square" lIns="91425" tIns="91425" rIns="91425" bIns="91425" anchor="ctr" anchorCtr="0">
             <a:normAutofit/>
           </a:bodyPr>
           <a:lstStyle>
-            <a:lvl1pPr indent="-342900" lvl="0" marL="457200">
+            <a:lvl1pPr marL="457200" lvl="0" indent="-342900">
               <a:spcBef>
                 <a:spcPts val="0"/>
               </a:spcBef>
@@ -3870,7 +3969,7 @@
               <a:buChar char="●"/>
               <a:defRPr/>
             </a:lvl1pPr>
-            <a:lvl2pPr indent="-317500" lvl="1" marL="914400">
+            <a:lvl2pPr marL="914400" lvl="1" indent="-317500">
               <a:spcBef>
                 <a:spcPts val="0"/>
               </a:spcBef>
@@ -3881,7 +3980,7 @@
               <a:buChar char="○"/>
               <a:defRPr/>
             </a:lvl2pPr>
-            <a:lvl3pPr indent="-317500" lvl="2" marL="1371600">
+            <a:lvl3pPr marL="1371600" lvl="2" indent="-317500">
               <a:spcBef>
                 <a:spcPts val="0"/>
               </a:spcBef>
@@ -3892,7 +3991,7 @@
               <a:buChar char="■"/>
               <a:defRPr/>
             </a:lvl3pPr>
-            <a:lvl4pPr indent="-317500" lvl="3" marL="1828800">
+            <a:lvl4pPr marL="1828800" lvl="3" indent="-317500">
               <a:spcBef>
                 <a:spcPts val="0"/>
               </a:spcBef>
@@ -3903,7 +4002,7 @@
               <a:buChar char="●"/>
               <a:defRPr/>
             </a:lvl4pPr>
-            <a:lvl5pPr indent="-317500" lvl="4" marL="2286000">
+            <a:lvl5pPr marL="2286000" lvl="4" indent="-317500">
               <a:spcBef>
                 <a:spcPts val="0"/>
               </a:spcBef>
@@ -3914,7 +4013,7 @@
               <a:buChar char="○"/>
               <a:defRPr/>
             </a:lvl5pPr>
-            <a:lvl6pPr indent="-317500" lvl="5" marL="2743200">
+            <a:lvl6pPr marL="2743200" lvl="5" indent="-317500">
               <a:spcBef>
                 <a:spcPts val="0"/>
               </a:spcBef>
@@ -3925,7 +4024,7 @@
               <a:buChar char="■"/>
               <a:defRPr/>
             </a:lvl6pPr>
-            <a:lvl7pPr indent="-317500" lvl="6" marL="3200400">
+            <a:lvl7pPr marL="3200400" lvl="6" indent="-317500">
               <a:spcBef>
                 <a:spcPts val="0"/>
               </a:spcBef>
@@ -3936,7 +4035,7 @@
               <a:buChar char="●"/>
               <a:defRPr/>
             </a:lvl7pPr>
-            <a:lvl8pPr indent="-317500" lvl="7" marL="3657600">
+            <a:lvl8pPr marL="3657600" lvl="7" indent="-317500">
               <a:spcBef>
                 <a:spcPts val="0"/>
               </a:spcBef>
@@ -3947,7 +4046,7 @@
               <a:buChar char="○"/>
               <a:defRPr/>
             </a:lvl8pPr>
-            <a:lvl9pPr indent="-317500" lvl="8" marL="4114800">
+            <a:lvl9pPr marL="4114800" lvl="8" indent="-317500">
               <a:spcBef>
                 <a:spcPts val="0"/>
               </a:spcBef>
@@ -3959,15 +4058,19 @@
               <a:defRPr/>
             </a:lvl9pPr>
           </a:lstStyle>
-          <a:p/>
+          <a:p>
+            <a:endParaRPr/>
+          </a:p>
         </p:txBody>
       </p:sp>
       <p:sp>
         <p:nvSpPr>
           <p:cNvPr id="40" name="Google Shape;40;p9"/>
-          <p:cNvSpPr txBox="1"/>
+          <p:cNvSpPr txBox="1">
+            <a:spLocks noGrp="1"/>
+          </p:cNvSpPr>
           <p:nvPr>
-            <p:ph idx="12" type="sldNum"/>
+            <p:ph type="sldNum" idx="12"/>
           </p:nvPr>
         </p:nvSpPr>
         <p:spPr>
@@ -3980,7 +4083,7 @@
           </a:prstGeom>
         </p:spPr>
         <p:txBody>
-          <a:bodyPr anchorCtr="0" anchor="ctr" bIns="91425" lIns="91425" spcFirstLastPara="1" rIns="91425" wrap="square" tIns="91425">
+          <a:bodyPr spcFirstLastPara="1" wrap="square" lIns="91425" tIns="91425" rIns="91425" bIns="91425" anchor="ctr" anchorCtr="0">
             <a:normAutofit/>
           </a:bodyPr>
           <a:lstStyle>
@@ -4022,7 +4125,7 @@
             </a:lvl9pPr>
           </a:lstStyle>
           <a:p>
-            <a:pPr indent="0" lvl="0" marL="0" rtl="0" algn="r">
+            <a:pPr marL="0" lvl="0" indent="0" algn="r" rtl="0">
               <a:spcBef>
                 <a:spcPts val="0"/>
               </a:spcBef>
@@ -4048,11 +4151,11 @@
 </file>
 
 <file path=ppt/slideLayouts/slideLayout9.xml><?xml version="1.0" encoding="utf-8"?>
-<p:sldLayout xmlns:a="http://schemas.openxmlformats.org/drawingml/2006/main" xmlns:r="http://schemas.openxmlformats.org/officeDocument/2006/relationships" xmlns:mc="http://schemas.openxmlformats.org/markup-compatibility/2006" xmlns:mv="urn:schemas-microsoft-com:mac:vml" xmlns:p="http://schemas.openxmlformats.org/presentationml/2006/main" xmlns:c="http://schemas.openxmlformats.org/drawingml/2006/chart" xmlns:dgm="http://schemas.openxmlformats.org/drawingml/2006/diagram" xmlns:o="urn:schemas-microsoft-com:office:office" xmlns:v="urn:schemas-microsoft-com:vml" xmlns:pvml="urn:schemas-microsoft-com:office:powerpoint" xmlns:com="http://schemas.openxmlformats.org/drawingml/2006/compatibility" xmlns:p14="http://schemas.microsoft.com/office/powerpoint/2010/main" xmlns:p15="http://schemas.microsoft.com/office/powerpoint/2012/main" xmlns:ahyp="http://schemas.microsoft.com/office/drawing/2018/hyperlinkcolor" matchingName="Caption">
+<p:sldLayout xmlns:a="http://schemas.openxmlformats.org/drawingml/2006/main" xmlns:r="http://schemas.openxmlformats.org/officeDocument/2006/relationships" xmlns:p="http://schemas.openxmlformats.org/presentationml/2006/main" matchingName="Caption">
   <p:cSld name="CAPTION_ONLY">
     <p:spTree>
       <p:nvGrpSpPr>
-        <p:cNvPr id="41" name="Shape 41"/>
+        <p:cNvPr id="1" name="Shape 41"/>
         <p:cNvGrpSpPr/>
         <p:nvPr/>
       </p:nvGrpSpPr>
@@ -4067,9 +4170,11 @@
       <p:sp>
         <p:nvSpPr>
           <p:cNvPr id="42" name="Google Shape;42;p10"/>
-          <p:cNvSpPr txBox="1"/>
+          <p:cNvSpPr txBox="1">
+            <a:spLocks noGrp="1"/>
+          </p:cNvSpPr>
           <p:nvPr>
-            <p:ph idx="1" type="body"/>
+            <p:ph type="body" idx="1"/>
           </p:nvPr>
         </p:nvSpPr>
         <p:spPr>
@@ -4082,11 +4187,11 @@
           </a:prstGeom>
         </p:spPr>
         <p:txBody>
-          <a:bodyPr anchorCtr="0" anchor="ctr" bIns="91425" lIns="91425" spcFirstLastPara="1" rIns="91425" wrap="square" tIns="91425">
+          <a:bodyPr spcFirstLastPara="1" wrap="square" lIns="91425" tIns="91425" rIns="91425" bIns="91425" anchor="ctr" anchorCtr="0">
             <a:normAutofit/>
           </a:bodyPr>
           <a:lstStyle>
-            <a:lvl1pPr indent="-228600" lvl="0" marL="457200">
+            <a:lvl1pPr marL="457200" lvl="0" indent="-228600">
               <a:lnSpc>
                 <a:spcPct val="100000"/>
               </a:lnSpc>
@@ -4101,15 +4206,19 @@
               <a:defRPr/>
             </a:lvl1pPr>
           </a:lstStyle>
-          <a:p/>
+          <a:p>
+            <a:endParaRPr/>
+          </a:p>
         </p:txBody>
       </p:sp>
       <p:sp>
         <p:nvSpPr>
           <p:cNvPr id="43" name="Google Shape;43;p10"/>
-          <p:cNvSpPr txBox="1"/>
+          <p:cNvSpPr txBox="1">
+            <a:spLocks noGrp="1"/>
+          </p:cNvSpPr>
           <p:nvPr>
-            <p:ph idx="12" type="sldNum"/>
+            <p:ph type="sldNum" idx="12"/>
           </p:nvPr>
         </p:nvSpPr>
         <p:spPr>
@@ -4122,7 +4231,7 @@
           </a:prstGeom>
         </p:spPr>
         <p:txBody>
-          <a:bodyPr anchorCtr="0" anchor="ctr" bIns="91425" lIns="91425" spcFirstLastPara="1" rIns="91425" wrap="square" tIns="91425">
+          <a:bodyPr spcFirstLastPara="1" wrap="square" lIns="91425" tIns="91425" rIns="91425" bIns="91425" anchor="ctr" anchorCtr="0">
             <a:normAutofit/>
           </a:bodyPr>
           <a:lstStyle>
@@ -4164,7 +4273,7 @@
             </a:lvl9pPr>
           </a:lstStyle>
           <a:p>
-            <a:pPr indent="0" lvl="0" marL="0" rtl="0" algn="r">
+            <a:pPr marL="0" lvl="0" indent="0" algn="r" rtl="0">
               <a:spcBef>
                 <a:spcPts val="0"/>
               </a:spcBef>
@@ -4190,18 +4299,19 @@
 </file>
 
 <file path=ppt/slideMasters/slideMaster1.xml><?xml version="1.0" encoding="utf-8"?>
-<p:sldMaster xmlns:a="http://schemas.openxmlformats.org/drawingml/2006/main" xmlns:r="http://schemas.openxmlformats.org/officeDocument/2006/relationships" xmlns:mc="http://schemas.openxmlformats.org/markup-compatibility/2006" xmlns:mv="urn:schemas-microsoft-com:mac:vml" xmlns:p="http://schemas.openxmlformats.org/presentationml/2006/main" xmlns:c="http://schemas.openxmlformats.org/drawingml/2006/chart" xmlns:dgm="http://schemas.openxmlformats.org/drawingml/2006/diagram" xmlns:o="urn:schemas-microsoft-com:office:office" xmlns:v="urn:schemas-microsoft-com:vml" xmlns:pvml="urn:schemas-microsoft-com:office:powerpoint" xmlns:com="http://schemas.openxmlformats.org/drawingml/2006/compatibility" xmlns:p14="http://schemas.microsoft.com/office/powerpoint/2010/main" xmlns:p15="http://schemas.microsoft.com/office/powerpoint/2012/main" xmlns:ahyp="http://schemas.microsoft.com/office/drawing/2018/hyperlinkcolor">
+<p:sldMaster xmlns:a="http://schemas.openxmlformats.org/drawingml/2006/main" xmlns:r="http://schemas.openxmlformats.org/officeDocument/2006/relationships" xmlns:p="http://schemas.openxmlformats.org/presentationml/2006/main">
   <p:cSld name="simple-light-2">
     <p:bg>
       <p:bgPr>
         <a:solidFill>
           <a:schemeClr val="lt1"/>
         </a:solidFill>
+        <a:effectLst/>
       </p:bgPr>
     </p:bg>
     <p:spTree>
       <p:nvGrpSpPr>
-        <p:cNvPr id="5" name="Shape 5"/>
+        <p:cNvPr id="1" name="Shape 5"/>
         <p:cNvGrpSpPr/>
         <p:nvPr/>
       </p:nvGrpSpPr>
@@ -4216,7 +4326,9 @@
       <p:sp>
         <p:nvSpPr>
           <p:cNvPr id="6" name="Google Shape;6;p1"/>
-          <p:cNvSpPr txBox="1"/>
+          <p:cNvSpPr txBox="1">
+            <a:spLocks noGrp="1"/>
+          </p:cNvSpPr>
           <p:nvPr>
             <p:ph type="title"/>
           </p:nvPr>
@@ -4235,7 +4347,7 @@
           </a:ln>
         </p:spPr>
         <p:txBody>
-          <a:bodyPr anchorCtr="0" anchor="t" bIns="91425" lIns="91425" spcFirstLastPara="1" rIns="91425" wrap="square" tIns="91425">
+          <a:bodyPr spcFirstLastPara="1" wrap="square" lIns="91425" tIns="91425" rIns="91425" bIns="91425" anchor="t" anchorCtr="0">
             <a:normAutofit/>
           </a:bodyPr>
           <a:lstStyle>
@@ -4402,15 +4514,19 @@
               </a:defRPr>
             </a:lvl9pPr>
           </a:lstStyle>
-          <a:p/>
+          <a:p>
+            <a:endParaRPr/>
+          </a:p>
         </p:txBody>
       </p:sp>
       <p:sp>
         <p:nvSpPr>
           <p:cNvPr id="7" name="Google Shape;7;p1"/>
-          <p:cNvSpPr txBox="1"/>
+          <p:cNvSpPr txBox="1">
+            <a:spLocks noGrp="1"/>
+          </p:cNvSpPr>
           <p:nvPr>
-            <p:ph idx="1" type="body"/>
+            <p:ph type="body" idx="1"/>
           </p:nvPr>
         </p:nvSpPr>
         <p:spPr>
@@ -4427,11 +4543,11 @@
           </a:ln>
         </p:spPr>
         <p:txBody>
-          <a:bodyPr anchorCtr="0" anchor="t" bIns="91425" lIns="91425" spcFirstLastPara="1" rIns="91425" wrap="square" tIns="91425">
+          <a:bodyPr spcFirstLastPara="1" wrap="square" lIns="91425" tIns="91425" rIns="91425" bIns="91425" anchor="t" anchorCtr="0">
             <a:normAutofit/>
           </a:bodyPr>
           <a:lstStyle>
-            <a:lvl1pPr indent="-342900" lvl="0" marL="457200">
+            <a:lvl1pPr marL="457200" lvl="0" indent="-342900">
               <a:lnSpc>
                 <a:spcPct val="115000"/>
               </a:lnSpc>
@@ -4452,7 +4568,7 @@
                 </a:solidFill>
               </a:defRPr>
             </a:lvl1pPr>
-            <a:lvl2pPr indent="-317500" lvl="1" marL="914400">
+            <a:lvl2pPr marL="914400" lvl="1" indent="-317500">
               <a:lnSpc>
                 <a:spcPct val="115000"/>
               </a:lnSpc>
@@ -4473,7 +4589,7 @@
                 </a:solidFill>
               </a:defRPr>
             </a:lvl2pPr>
-            <a:lvl3pPr indent="-317500" lvl="2" marL="1371600">
+            <a:lvl3pPr marL="1371600" lvl="2" indent="-317500">
               <a:lnSpc>
                 <a:spcPct val="115000"/>
               </a:lnSpc>
@@ -4494,7 +4610,7 @@
                 </a:solidFill>
               </a:defRPr>
             </a:lvl3pPr>
-            <a:lvl4pPr indent="-317500" lvl="3" marL="1828800">
+            <a:lvl4pPr marL="1828800" lvl="3" indent="-317500">
               <a:lnSpc>
                 <a:spcPct val="115000"/>
               </a:lnSpc>
@@ -4515,7 +4631,7 @@
                 </a:solidFill>
               </a:defRPr>
             </a:lvl4pPr>
-            <a:lvl5pPr indent="-317500" lvl="4" marL="2286000">
+            <a:lvl5pPr marL="2286000" lvl="4" indent="-317500">
               <a:lnSpc>
                 <a:spcPct val="115000"/>
               </a:lnSpc>
@@ -4536,7 +4652,7 @@
                 </a:solidFill>
               </a:defRPr>
             </a:lvl5pPr>
-            <a:lvl6pPr indent="-317500" lvl="5" marL="2743200">
+            <a:lvl6pPr marL="2743200" lvl="5" indent="-317500">
               <a:lnSpc>
                 <a:spcPct val="115000"/>
               </a:lnSpc>
@@ -4557,7 +4673,7 @@
                 </a:solidFill>
               </a:defRPr>
             </a:lvl6pPr>
-            <a:lvl7pPr indent="-317500" lvl="6" marL="3200400">
+            <a:lvl7pPr marL="3200400" lvl="6" indent="-317500">
               <a:lnSpc>
                 <a:spcPct val="115000"/>
               </a:lnSpc>
@@ -4578,7 +4694,7 @@
                 </a:solidFill>
               </a:defRPr>
             </a:lvl7pPr>
-            <a:lvl8pPr indent="-317500" lvl="7" marL="3657600">
+            <a:lvl8pPr marL="3657600" lvl="7" indent="-317500">
               <a:lnSpc>
                 <a:spcPct val="115000"/>
               </a:lnSpc>
@@ -4599,7 +4715,7 @@
                 </a:solidFill>
               </a:defRPr>
             </a:lvl8pPr>
-            <a:lvl9pPr indent="-317500" lvl="8" marL="4114800">
+            <a:lvl9pPr marL="4114800" lvl="8" indent="-317500">
               <a:lnSpc>
                 <a:spcPct val="115000"/>
               </a:lnSpc>
@@ -4621,15 +4737,19 @@
               </a:defRPr>
             </a:lvl9pPr>
           </a:lstStyle>
-          <a:p/>
+          <a:p>
+            <a:endParaRPr/>
+          </a:p>
         </p:txBody>
       </p:sp>
       <p:sp>
         <p:nvSpPr>
           <p:cNvPr id="8" name="Google Shape;8;p1"/>
-          <p:cNvSpPr txBox="1"/>
+          <p:cNvSpPr txBox="1">
+            <a:spLocks noGrp="1"/>
+          </p:cNvSpPr>
           <p:nvPr>
-            <p:ph idx="12" type="sldNum"/>
+            <p:ph type="sldNum" idx="12"/>
           </p:nvPr>
         </p:nvSpPr>
         <p:spPr>
@@ -4646,7 +4766,7 @@
           </a:ln>
         </p:spPr>
         <p:txBody>
-          <a:bodyPr anchorCtr="0" anchor="ctr" bIns="91425" lIns="91425" spcFirstLastPara="1" rIns="91425" wrap="square" tIns="91425">
+          <a:bodyPr spcFirstLastPara="1" wrap="square" lIns="91425" tIns="91425" rIns="91425" bIns="91425" anchor="ctr" anchorCtr="0">
             <a:normAutofit/>
           </a:bodyPr>
           <a:lstStyle>
@@ -4724,7 +4844,7 @@
             </a:lvl9pPr>
           </a:lstStyle>
           <a:p>
-            <a:pPr indent="0" lvl="0" marL="0" rtl="0" algn="r">
+            <a:pPr marL="0" lvl="0" indent="0" algn="r" rtl="0">
               <a:spcBef>
                 <a:spcPts val="0"/>
               </a:spcBef>
@@ -4743,7 +4863,7 @@
       </p:sp>
     </p:spTree>
   </p:cSld>
-  <p:clrMap accent1="accent1" accent2="accent2" accent3="accent3" accent4="accent4" accent5="accent5" accent6="accent6" bg1="lt1" bg2="dk2" tx1="dk1" tx2="lt2" folHlink="folHlink" hlink="hlink"/>
+  <p:clrMap bg1="lt1" tx1="dk1" bg2="dk2" tx2="lt2" accent1="accent1" accent2="accent2" accent3="accent3" accent4="accent4" accent5="accent5" accent6="accent6" hlink="hlink" folHlink="folHlink"/>
   <p:sldLayoutIdLst>
     <p:sldLayoutId id="2147483648" r:id="rId1"/>
     <p:sldLayoutId id="2147483649" r:id="rId2"/>
@@ -4757,10 +4877,10 @@
     <p:sldLayoutId id="2147483657" r:id="rId10"/>
     <p:sldLayoutId id="2147483658" r:id="rId11"/>
   </p:sldLayoutIdLst>
-  <p:hf dt="0" ftr="0" hdr="0" sldNum="0"/>
+  <p:hf sldNum="0" hdr="0" ftr="0" dt="0"/>
   <p:txStyles>
     <p:titleStyle>
-      <a:defPPr lvl="0" marR="0" rtl="0" algn="l">
+      <a:defPPr marR="0" lvl="0" algn="l" rtl="0">
         <a:lnSpc>
           <a:spcPct val="100000"/>
         </a:lnSpc>
@@ -4771,7 +4891,7 @@
           <a:spcPts val="0"/>
         </a:spcAft>
       </a:defPPr>
-      <a:lvl1pPr lvl="0" marR="0" rtl="0" algn="l">
+      <a:lvl1pPr marR="0" lvl="0" algn="l" rtl="0">
         <a:lnSpc>
           <a:spcPct val="100000"/>
         </a:lnSpc>
@@ -4785,7 +4905,7 @@
           <a:srgbClr val="000000"/>
         </a:buClr>
         <a:buFont typeface="Arial"/>
-        <a:defRPr b="0" i="0" spc="0" sz="1400" u="none" cap="none" strike="noStrike">
+        <a:defRPr sz="1400" b="0" i="0" u="none" strike="noStrike" cap="none" spc="0">
           <a:solidFill>
             <a:srgbClr val="000000"/>
           </a:solidFill>
@@ -4795,7 +4915,7 @@
           <a:sym typeface="Arial"/>
         </a:defRPr>
       </a:lvl1pPr>
-      <a:lvl2pPr lvl="1" marR="0" rtl="0" algn="l">
+      <a:lvl2pPr marR="0" lvl="1" algn="l" rtl="0">
         <a:lnSpc>
           <a:spcPct val="100000"/>
         </a:lnSpc>
@@ -4809,7 +4929,7 @@
           <a:srgbClr val="000000"/>
         </a:buClr>
         <a:buFont typeface="Arial"/>
-        <a:defRPr b="0" i="0" spc="0" sz="1400" u="none" cap="none" strike="noStrike">
+        <a:defRPr sz="1400" b="0" i="0" u="none" strike="noStrike" cap="none" spc="0">
           <a:solidFill>
             <a:srgbClr val="000000"/>
           </a:solidFill>
@@ -4819,7 +4939,7 @@
           <a:sym typeface="Arial"/>
         </a:defRPr>
       </a:lvl2pPr>
-      <a:lvl3pPr lvl="2" marR="0" rtl="0" algn="l">
+      <a:lvl3pPr marR="0" lvl="2" algn="l" rtl="0">
         <a:lnSpc>
           <a:spcPct val="100000"/>
         </a:lnSpc>
@@ -4833,7 +4953,7 @@
           <a:srgbClr val="000000"/>
         </a:buClr>
         <a:buFont typeface="Arial"/>
-        <a:defRPr b="0" i="0" spc="0" sz="1400" u="none" cap="none" strike="noStrike">
+        <a:defRPr sz="1400" b="0" i="0" u="none" strike="noStrike" cap="none" spc="0">
           <a:solidFill>
             <a:srgbClr val="000000"/>
           </a:solidFill>
@@ -4843,7 +4963,7 @@
           <a:sym typeface="Arial"/>
         </a:defRPr>
       </a:lvl3pPr>
-      <a:lvl4pPr lvl="3" marR="0" rtl="0" algn="l">
+      <a:lvl4pPr marR="0" lvl="3" algn="l" rtl="0">
         <a:lnSpc>
           <a:spcPct val="100000"/>
         </a:lnSpc>
@@ -4857,7 +4977,7 @@
           <a:srgbClr val="000000"/>
         </a:buClr>
         <a:buFont typeface="Arial"/>
-        <a:defRPr b="0" i="0" spc="0" sz="1400" u="none" cap="none" strike="noStrike">
+        <a:defRPr sz="1400" b="0" i="0" u="none" strike="noStrike" cap="none" spc="0">
           <a:solidFill>
             <a:srgbClr val="000000"/>
           </a:solidFill>
@@ -4867,7 +4987,7 @@
           <a:sym typeface="Arial"/>
         </a:defRPr>
       </a:lvl4pPr>
-      <a:lvl5pPr lvl="4" marR="0" rtl="0" algn="l">
+      <a:lvl5pPr marR="0" lvl="4" algn="l" rtl="0">
         <a:lnSpc>
           <a:spcPct val="100000"/>
         </a:lnSpc>
@@ -4881,7 +5001,7 @@
           <a:srgbClr val="000000"/>
         </a:buClr>
         <a:buFont typeface="Arial"/>
-        <a:defRPr b="0" i="0" spc="0" sz="1400" u="none" cap="none" strike="noStrike">
+        <a:defRPr sz="1400" b="0" i="0" u="none" strike="noStrike" cap="none" spc="0">
           <a:solidFill>
             <a:srgbClr val="000000"/>
           </a:solidFill>
@@ -4891,7 +5011,7 @@
           <a:sym typeface="Arial"/>
         </a:defRPr>
       </a:lvl5pPr>
-      <a:lvl6pPr lvl="5" marR="0" rtl="0" algn="l">
+      <a:lvl6pPr marR="0" lvl="5" algn="l" rtl="0">
         <a:lnSpc>
           <a:spcPct val="100000"/>
         </a:lnSpc>
@@ -4905,7 +5025,7 @@
           <a:srgbClr val="000000"/>
         </a:buClr>
         <a:buFont typeface="Arial"/>
-        <a:defRPr b="0" i="0" spc="0" sz="1400" u="none" cap="none" strike="noStrike">
+        <a:defRPr sz="1400" b="0" i="0" u="none" strike="noStrike" cap="none" spc="0">
           <a:solidFill>
             <a:srgbClr val="000000"/>
           </a:solidFill>
@@ -4915,7 +5035,7 @@
           <a:sym typeface="Arial"/>
         </a:defRPr>
       </a:lvl6pPr>
-      <a:lvl7pPr lvl="6" marR="0" rtl="0" algn="l">
+      <a:lvl7pPr marR="0" lvl="6" algn="l" rtl="0">
         <a:lnSpc>
           <a:spcPct val="100000"/>
         </a:lnSpc>
@@ -4929,7 +5049,7 @@
           <a:srgbClr val="000000"/>
         </a:buClr>
         <a:buFont typeface="Arial"/>
-        <a:defRPr b="0" i="0" spc="0" sz="1400" u="none" cap="none" strike="noStrike">
+        <a:defRPr sz="1400" b="0" i="0" u="none" strike="noStrike" cap="none" spc="0">
           <a:solidFill>
             <a:srgbClr val="000000"/>
           </a:solidFill>
@@ -4939,7 +5059,7 @@
           <a:sym typeface="Arial"/>
         </a:defRPr>
       </a:lvl7pPr>
-      <a:lvl8pPr lvl="7" marR="0" rtl="0" algn="l">
+      <a:lvl8pPr marR="0" lvl="7" algn="l" rtl="0">
         <a:lnSpc>
           <a:spcPct val="100000"/>
         </a:lnSpc>
@@ -4953,7 +5073,7 @@
           <a:srgbClr val="000000"/>
         </a:buClr>
         <a:buFont typeface="Arial"/>
-        <a:defRPr b="0" i="0" spc="0" sz="1400" u="none" cap="none" strike="noStrike">
+        <a:defRPr sz="1400" b="0" i="0" u="none" strike="noStrike" cap="none" spc="0">
           <a:solidFill>
             <a:srgbClr val="000000"/>
           </a:solidFill>
@@ -4963,7 +5083,7 @@
           <a:sym typeface="Arial"/>
         </a:defRPr>
       </a:lvl8pPr>
-      <a:lvl9pPr lvl="8" marR="0" rtl="0" algn="l">
+      <a:lvl9pPr marR="0" lvl="8" algn="l" rtl="0">
         <a:lnSpc>
           <a:spcPct val="100000"/>
         </a:lnSpc>
@@ -4977,7 +5097,7 @@
           <a:srgbClr val="000000"/>
         </a:buClr>
         <a:buFont typeface="Arial"/>
-        <a:defRPr b="0" i="0" spc="0" sz="1400" u="none" cap="none" strike="noStrike">
+        <a:defRPr sz="1400" b="0" i="0" u="none" strike="noStrike" cap="none" spc="0">
           <a:solidFill>
             <a:srgbClr val="000000"/>
           </a:solidFill>
@@ -4989,7 +5109,7 @@
       </a:lvl9pPr>
     </p:titleStyle>
     <p:bodyStyle>
-      <a:defPPr lvl="0" marR="0" rtl="0" algn="l">
+      <a:defPPr marR="0" lvl="0" algn="l" rtl="0">
         <a:lnSpc>
           <a:spcPct val="100000"/>
         </a:lnSpc>
@@ -5000,7 +5120,7 @@
           <a:spcPts val="0"/>
         </a:spcAft>
       </a:defPPr>
-      <a:lvl1pPr lvl="0" marR="0" rtl="0" algn="l">
+      <a:lvl1pPr marR="0" lvl="0" algn="l" rtl="0">
         <a:lnSpc>
           <a:spcPct val="100000"/>
         </a:lnSpc>
@@ -5014,7 +5134,7 @@
           <a:srgbClr val="000000"/>
         </a:buClr>
         <a:buFont typeface="Arial"/>
-        <a:defRPr b="0" i="0" spc="0" sz="1400" u="none" cap="none" strike="noStrike">
+        <a:defRPr sz="1400" b="0" i="0" u="none" strike="noStrike" cap="none" spc="0">
           <a:solidFill>
             <a:srgbClr val="000000"/>
           </a:solidFill>
@@ -5024,7 +5144,7 @@
           <a:sym typeface="Arial"/>
         </a:defRPr>
       </a:lvl1pPr>
-      <a:lvl2pPr lvl="1" marR="0" rtl="0" algn="l">
+      <a:lvl2pPr marR="0" lvl="1" algn="l" rtl="0">
         <a:lnSpc>
           <a:spcPct val="100000"/>
         </a:lnSpc>
@@ -5038,7 +5158,7 @@
           <a:srgbClr val="000000"/>
         </a:buClr>
         <a:buFont typeface="Arial"/>
-        <a:defRPr b="0" i="0" spc="0" sz="1400" u="none" cap="none" strike="noStrike">
+        <a:defRPr sz="1400" b="0" i="0" u="none" strike="noStrike" cap="none" spc="0">
           <a:solidFill>
             <a:srgbClr val="000000"/>
           </a:solidFill>
@@ -5048,7 +5168,7 @@
           <a:sym typeface="Arial"/>
         </a:defRPr>
       </a:lvl2pPr>
-      <a:lvl3pPr lvl="2" marR="0" rtl="0" algn="l">
+      <a:lvl3pPr marR="0" lvl="2" algn="l" rtl="0">
         <a:lnSpc>
           <a:spcPct val="100000"/>
         </a:lnSpc>
@@ -5062,7 +5182,7 @@
           <a:srgbClr val="000000"/>
         </a:buClr>
         <a:buFont typeface="Arial"/>
-        <a:defRPr b="0" i="0" spc="0" sz="1400" u="none" cap="none" strike="noStrike">
+        <a:defRPr sz="1400" b="0" i="0" u="none" strike="noStrike" cap="none" spc="0">
           <a:solidFill>
             <a:srgbClr val="000000"/>
           </a:solidFill>
@@ -5072,7 +5192,7 @@
           <a:sym typeface="Arial"/>
         </a:defRPr>
       </a:lvl3pPr>
-      <a:lvl4pPr lvl="3" marR="0" rtl="0" algn="l">
+      <a:lvl4pPr marR="0" lvl="3" algn="l" rtl="0">
         <a:lnSpc>
           <a:spcPct val="100000"/>
         </a:lnSpc>
@@ -5086,7 +5206,7 @@
           <a:srgbClr val="000000"/>
         </a:buClr>
         <a:buFont typeface="Arial"/>
-        <a:defRPr b="0" i="0" spc="0" sz="1400" u="none" cap="none" strike="noStrike">
+        <a:defRPr sz="1400" b="0" i="0" u="none" strike="noStrike" cap="none" spc="0">
           <a:solidFill>
             <a:srgbClr val="000000"/>
           </a:solidFill>
@@ -5096,7 +5216,7 @@
           <a:sym typeface="Arial"/>
         </a:defRPr>
       </a:lvl4pPr>
-      <a:lvl5pPr lvl="4" marR="0" rtl="0" algn="l">
+      <a:lvl5pPr marR="0" lvl="4" algn="l" rtl="0">
         <a:lnSpc>
           <a:spcPct val="100000"/>
         </a:lnSpc>
@@ -5110,7 +5230,7 @@
           <a:srgbClr val="000000"/>
         </a:buClr>
         <a:buFont typeface="Arial"/>
-        <a:defRPr b="0" i="0" spc="0" sz="1400" u="none" cap="none" strike="noStrike">
+        <a:defRPr sz="1400" b="0" i="0" u="none" strike="noStrike" cap="none" spc="0">
           <a:solidFill>
             <a:srgbClr val="000000"/>
           </a:solidFill>
@@ -5120,7 +5240,7 @@
           <a:sym typeface="Arial"/>
         </a:defRPr>
       </a:lvl5pPr>
-      <a:lvl6pPr lvl="5" marR="0" rtl="0" algn="l">
+      <a:lvl6pPr marR="0" lvl="5" algn="l" rtl="0">
         <a:lnSpc>
           <a:spcPct val="100000"/>
         </a:lnSpc>
@@ -5134,7 +5254,7 @@
           <a:srgbClr val="000000"/>
         </a:buClr>
         <a:buFont typeface="Arial"/>
-        <a:defRPr b="0" i="0" spc="0" sz="1400" u="none" cap="none" strike="noStrike">
+        <a:defRPr sz="1400" b="0" i="0" u="none" strike="noStrike" cap="none" spc="0">
           <a:solidFill>
             <a:srgbClr val="000000"/>
           </a:solidFill>
@@ -5144,7 +5264,7 @@
           <a:sym typeface="Arial"/>
         </a:defRPr>
       </a:lvl6pPr>
-      <a:lvl7pPr lvl="6" marR="0" rtl="0" algn="l">
+      <a:lvl7pPr marR="0" lvl="6" algn="l" rtl="0">
         <a:lnSpc>
           <a:spcPct val="100000"/>
         </a:lnSpc>
@@ -5158,7 +5278,7 @@
           <a:srgbClr val="000000"/>
         </a:buClr>
         <a:buFont typeface="Arial"/>
-        <a:defRPr b="0" i="0" spc="0" sz="1400" u="none" cap="none" strike="noStrike">
+        <a:defRPr sz="1400" b="0" i="0" u="none" strike="noStrike" cap="none" spc="0">
           <a:solidFill>
             <a:srgbClr val="000000"/>
           </a:solidFill>
@@ -5168,7 +5288,7 @@
           <a:sym typeface="Arial"/>
         </a:defRPr>
       </a:lvl7pPr>
-      <a:lvl8pPr lvl="7" marR="0" rtl="0" algn="l">
+      <a:lvl8pPr marR="0" lvl="7" algn="l" rtl="0">
         <a:lnSpc>
           <a:spcPct val="100000"/>
         </a:lnSpc>
@@ -5182,7 +5302,7 @@
           <a:srgbClr val="000000"/>
         </a:buClr>
         <a:buFont typeface="Arial"/>
-        <a:defRPr b="0" i="0" spc="0" sz="1400" u="none" cap="none" strike="noStrike">
+        <a:defRPr sz="1400" b="0" i="0" u="none" strike="noStrike" cap="none" spc="0">
           <a:solidFill>
             <a:srgbClr val="000000"/>
           </a:solidFill>
@@ -5192,7 +5312,7 @@
           <a:sym typeface="Arial"/>
         </a:defRPr>
       </a:lvl8pPr>
-      <a:lvl9pPr lvl="8" marR="0" rtl="0" algn="l">
+      <a:lvl9pPr marR="0" lvl="8" algn="l" rtl="0">
         <a:lnSpc>
           <a:spcPct val="100000"/>
         </a:lnSpc>
@@ -5206,7 +5326,7 @@
           <a:srgbClr val="000000"/>
         </a:buClr>
         <a:buFont typeface="Arial"/>
-        <a:defRPr b="0" i="0" spc="0" sz="1400" u="none" cap="none" strike="noStrike">
+        <a:defRPr sz="1400" b="0" i="0" u="none" strike="noStrike" cap="none" spc="0">
           <a:solidFill>
             <a:srgbClr val="000000"/>
           </a:solidFill>
@@ -5218,7 +5338,7 @@
       </a:lvl9pPr>
     </p:bodyStyle>
     <p:otherStyle>
-      <a:defPPr lvl="0" marR="0" rtl="0" algn="l">
+      <a:defPPr marR="0" lvl="0" algn="l" rtl="0">
         <a:lnSpc>
           <a:spcPct val="100000"/>
         </a:lnSpc>
@@ -5229,7 +5349,7 @@
           <a:spcPts val="0"/>
         </a:spcAft>
       </a:defPPr>
-      <a:lvl1pPr lvl="0" marR="0" rtl="0" algn="l">
+      <a:lvl1pPr marR="0" lvl="0" algn="l" rtl="0">
         <a:lnSpc>
           <a:spcPct val="100000"/>
         </a:lnSpc>
@@ -5243,7 +5363,7 @@
           <a:srgbClr val="000000"/>
         </a:buClr>
         <a:buFont typeface="Arial"/>
-        <a:defRPr b="0" i="0" spc="0" sz="1400" u="none" cap="none" strike="noStrike">
+        <a:defRPr sz="1400" b="0" i="0" u="none" strike="noStrike" cap="none" spc="0">
           <a:solidFill>
             <a:srgbClr val="000000"/>
           </a:solidFill>
@@ -5253,7 +5373,7 @@
           <a:sym typeface="Arial"/>
         </a:defRPr>
       </a:lvl1pPr>
-      <a:lvl2pPr lvl="1" marR="0" rtl="0" algn="l">
+      <a:lvl2pPr marR="0" lvl="1" algn="l" rtl="0">
         <a:lnSpc>
           <a:spcPct val="100000"/>
         </a:lnSpc>
@@ -5267,7 +5387,7 @@
           <a:srgbClr val="000000"/>
         </a:buClr>
         <a:buFont typeface="Arial"/>
-        <a:defRPr b="0" i="0" spc="0" sz="1400" u="none" cap="none" strike="noStrike">
+        <a:defRPr sz="1400" b="0" i="0" u="none" strike="noStrike" cap="none" spc="0">
           <a:solidFill>
             <a:srgbClr val="000000"/>
           </a:solidFill>
@@ -5277,7 +5397,7 @@
           <a:sym typeface="Arial"/>
         </a:defRPr>
       </a:lvl2pPr>
-      <a:lvl3pPr lvl="2" marR="0" rtl="0" algn="l">
+      <a:lvl3pPr marR="0" lvl="2" algn="l" rtl="0">
         <a:lnSpc>
           <a:spcPct val="100000"/>
         </a:lnSpc>
@@ -5291,7 +5411,7 @@
           <a:srgbClr val="000000"/>
         </a:buClr>
         <a:buFont typeface="Arial"/>
-        <a:defRPr b="0" i="0" spc="0" sz="1400" u="none" cap="none" strike="noStrike">
+        <a:defRPr sz="1400" b="0" i="0" u="none" strike="noStrike" cap="none" spc="0">
           <a:solidFill>
             <a:srgbClr val="000000"/>
           </a:solidFill>
@@ -5301,7 +5421,7 @@
           <a:sym typeface="Arial"/>
         </a:defRPr>
       </a:lvl3pPr>
-      <a:lvl4pPr lvl="3" marR="0" rtl="0" algn="l">
+      <a:lvl4pPr marR="0" lvl="3" algn="l" rtl="0">
         <a:lnSpc>
           <a:spcPct val="100000"/>
         </a:lnSpc>
@@ -5315,7 +5435,7 @@
           <a:srgbClr val="000000"/>
         </a:buClr>
         <a:buFont typeface="Arial"/>
-        <a:defRPr b="0" i="0" spc="0" sz="1400" u="none" cap="none" strike="noStrike">
+        <a:defRPr sz="1400" b="0" i="0" u="none" strike="noStrike" cap="none" spc="0">
           <a:solidFill>
             <a:srgbClr val="000000"/>
           </a:solidFill>
@@ -5325,7 +5445,7 @@
           <a:sym typeface="Arial"/>
         </a:defRPr>
       </a:lvl4pPr>
-      <a:lvl5pPr lvl="4" marR="0" rtl="0" algn="l">
+      <a:lvl5pPr marR="0" lvl="4" algn="l" rtl="0">
         <a:lnSpc>
           <a:spcPct val="100000"/>
         </a:lnSpc>
@@ -5339,7 +5459,7 @@
           <a:srgbClr val="000000"/>
         </a:buClr>
         <a:buFont typeface="Arial"/>
-        <a:defRPr b="0" i="0" spc="0" sz="1400" u="none" cap="none" strike="noStrike">
+        <a:defRPr sz="1400" b="0" i="0" u="none" strike="noStrike" cap="none" spc="0">
           <a:solidFill>
             <a:srgbClr val="000000"/>
           </a:solidFill>
@@ -5349,7 +5469,7 @@
           <a:sym typeface="Arial"/>
         </a:defRPr>
       </a:lvl5pPr>
-      <a:lvl6pPr lvl="5" marR="0" rtl="0" algn="l">
+      <a:lvl6pPr marR="0" lvl="5" algn="l" rtl="0">
         <a:lnSpc>
           <a:spcPct val="100000"/>
         </a:lnSpc>
@@ -5363,7 +5483,7 @@
           <a:srgbClr val="000000"/>
         </a:buClr>
         <a:buFont typeface="Arial"/>
-        <a:defRPr b="0" i="0" spc="0" sz="1400" u="none" cap="none" strike="noStrike">
+        <a:defRPr sz="1400" b="0" i="0" u="none" strike="noStrike" cap="none" spc="0">
           <a:solidFill>
             <a:srgbClr val="000000"/>
           </a:solidFill>
@@ -5373,7 +5493,7 @@
           <a:sym typeface="Arial"/>
         </a:defRPr>
       </a:lvl6pPr>
-      <a:lvl7pPr lvl="6" marR="0" rtl="0" algn="l">
+      <a:lvl7pPr marR="0" lvl="6" algn="l" rtl="0">
         <a:lnSpc>
           <a:spcPct val="100000"/>
         </a:lnSpc>
@@ -5387,7 +5507,7 @@
           <a:srgbClr val="000000"/>
         </a:buClr>
         <a:buFont typeface="Arial"/>
-        <a:defRPr b="0" i="0" spc="0" sz="1400" u="none" cap="none" strike="noStrike">
+        <a:defRPr sz="1400" b="0" i="0" u="none" strike="noStrike" cap="none" spc="0">
           <a:solidFill>
             <a:srgbClr val="000000"/>
           </a:solidFill>
@@ -5397,7 +5517,7 @@
           <a:sym typeface="Arial"/>
         </a:defRPr>
       </a:lvl7pPr>
-      <a:lvl8pPr lvl="7" marR="0" rtl="0" algn="l">
+      <a:lvl8pPr marR="0" lvl="7" algn="l" rtl="0">
         <a:lnSpc>
           <a:spcPct val="100000"/>
         </a:lnSpc>
@@ -5411,7 +5531,7 @@
           <a:srgbClr val="000000"/>
         </a:buClr>
         <a:buFont typeface="Arial"/>
-        <a:defRPr b="0" i="0" spc="0" sz="1400" u="none" cap="none" strike="noStrike">
+        <a:defRPr sz="1400" b="0" i="0" u="none" strike="noStrike" cap="none" spc="0">
           <a:solidFill>
             <a:srgbClr val="000000"/>
           </a:solidFill>
@@ -5421,7 +5541,7 @@
           <a:sym typeface="Arial"/>
         </a:defRPr>
       </a:lvl8pPr>
-      <a:lvl9pPr lvl="8" marR="0" rtl="0" algn="l">
+      <a:lvl9pPr marR="0" lvl="8" algn="l" rtl="0">
         <a:lnSpc>
           <a:spcPct val="100000"/>
         </a:lnSpc>
@@ -5435,7 +5555,7 @@
           <a:srgbClr val="000000"/>
         </a:buClr>
         <a:buFont typeface="Arial"/>
-        <a:defRPr b="0" i="0" spc="0" sz="1400" u="none" cap="none" strike="noStrike">
+        <a:defRPr sz="1400" b="0" i="0" u="none" strike="noStrike" cap="none" spc="0">
           <a:solidFill>
             <a:srgbClr val="000000"/>
           </a:solidFill>
@@ -5451,7 +5571,7 @@
 </file>
 
 <file path=ppt/slides/slide1.xml><?xml version="1.0" encoding="utf-8"?>
-<p:sld xmlns:a="http://schemas.openxmlformats.org/drawingml/2006/main" xmlns:r="http://schemas.openxmlformats.org/officeDocument/2006/relationships" xmlns:mc="http://schemas.openxmlformats.org/markup-compatibility/2006" xmlns:mv="urn:schemas-microsoft-com:mac:vml" xmlns:p="http://schemas.openxmlformats.org/presentationml/2006/main" xmlns:c="http://schemas.openxmlformats.org/drawingml/2006/chart" xmlns:dgm="http://schemas.openxmlformats.org/drawingml/2006/diagram" xmlns:o="urn:schemas-microsoft-com:office:office" xmlns:v="urn:schemas-microsoft-com:vml" xmlns:pvml="urn:schemas-microsoft-com:office:powerpoint" xmlns:com="http://schemas.openxmlformats.org/drawingml/2006/compatibility" xmlns:p14="http://schemas.microsoft.com/office/powerpoint/2010/main" xmlns:p15="http://schemas.microsoft.com/office/powerpoint/2012/main" xmlns:ahyp="http://schemas.microsoft.com/office/drawing/2018/hyperlinkcolor">
+<p:sld xmlns:a="http://schemas.openxmlformats.org/drawingml/2006/main" xmlns:r="http://schemas.openxmlformats.org/officeDocument/2006/relationships" xmlns:p="http://schemas.openxmlformats.org/presentationml/2006/main">
   <p:cSld>
     <p:bg>
       <p:bgPr>
@@ -5463,11 +5583,12 @@
             <a:fillRect/>
           </a:stretch>
         </a:blipFill>
+        <a:effectLst/>
       </p:bgPr>
     </p:bg>
     <p:spTree>
       <p:nvGrpSpPr>
-        <p:cNvPr id="53" name="Shape 53"/>
+        <p:cNvPr id="1" name="Shape 53"/>
         <p:cNvGrpSpPr/>
         <p:nvPr/>
       </p:nvGrpSpPr>
@@ -5499,12 +5620,12 @@
           </a:ln>
         </p:spPr>
         <p:txBody>
-          <a:bodyPr anchorCtr="0" anchor="t" bIns="91425" lIns="91425" spcFirstLastPara="1" rIns="91425" wrap="square" tIns="91425">
+          <a:bodyPr spcFirstLastPara="1" wrap="square" lIns="91425" tIns="91425" rIns="91425" bIns="91425" anchor="t" anchorCtr="0">
             <a:noAutofit/>
           </a:bodyPr>
           <a:lstStyle/>
           <a:p>
-            <a:pPr indent="0" lvl="0" marL="0" rtl="0" algn="l">
+            <a:pPr marL="0" lvl="0" indent="0" algn="l" rtl="0">
               <a:spcBef>
                 <a:spcPts val="0"/>
               </a:spcBef>
@@ -5514,7 +5635,7 @@
               <a:buNone/>
             </a:pPr>
             <a:r>
-              <a:rPr lang="en" sz="1100">
+              <a:rPr lang="en" sz="1100" dirty="0">
                 <a:solidFill>
                   <a:schemeClr val="lt1"/>
                 </a:solidFill>
@@ -5523,9 +5644,9 @@
                 <a:cs typeface="Archivo Medium"/>
                 <a:sym typeface="Archivo Medium"/>
               </a:rPr>
-              <a:t>&lt;&lt;Inspiración del día&gt;&gt;</a:t>
+              <a:t>&lt;&lt;insp_dia&gt;&gt;</a:t>
             </a:r>
-            <a:endParaRPr sz="1000">
+            <a:endParaRPr sz="1000" dirty="0">
               <a:solidFill>
                 <a:schemeClr val="lt1"/>
               </a:solidFill>
@@ -5557,12 +5678,12 @@
           </a:ln>
         </p:spPr>
         <p:txBody>
-          <a:bodyPr anchorCtr="0" anchor="t" bIns="91425" lIns="91425" spcFirstLastPara="1" rIns="91425" wrap="square" tIns="91425">
+          <a:bodyPr spcFirstLastPara="1" wrap="square" lIns="91425" tIns="91425" rIns="91425" bIns="91425" anchor="t" anchorCtr="0">
             <a:noAutofit/>
           </a:bodyPr>
           <a:lstStyle/>
           <a:p>
-            <a:pPr indent="0" lvl="0" marL="0" rtl="0" algn="l">
+            <a:pPr marL="0" lvl="0" indent="0" algn="l" rtl="0">
               <a:spcBef>
                 <a:spcPts val="0"/>
               </a:spcBef>
@@ -5615,12 +5736,12 @@
           </a:ln>
         </p:spPr>
         <p:txBody>
-          <a:bodyPr anchorCtr="0" anchor="t" bIns="91425" lIns="91425" spcFirstLastPara="1" rIns="91425" wrap="square" tIns="91425">
+          <a:bodyPr spcFirstLastPara="1" wrap="square" lIns="91425" tIns="91425" rIns="91425" bIns="91425" anchor="t" anchorCtr="0">
             <a:noAutofit/>
           </a:bodyPr>
           <a:lstStyle/>
           <a:p>
-            <a:pPr indent="0" lvl="0" marL="0" rtl="0" algn="l">
+            <a:pPr marL="0" lvl="0" indent="0" algn="l" rtl="0">
               <a:spcBef>
                 <a:spcPts val="0"/>
               </a:spcBef>
@@ -5630,7 +5751,7 @@
               <a:buNone/>
             </a:pPr>
             <a:r>
-              <a:rPr b="1" lang="en" sz="1600">
+              <a:rPr lang="en" sz="1600" b="1" dirty="0">
                 <a:solidFill>
                   <a:srgbClr val="FF6C4C"/>
                 </a:solidFill>
@@ -5639,9 +5760,9 @@
                 <a:cs typeface="Archivo"/>
                 <a:sym typeface="Archivo"/>
               </a:rPr>
-              <a:t>&lt;&lt;Nombre Completo&gt;&gt;</a:t>
+              <a:t>&lt;&lt;Nombre y Apellido&gt;&gt;</a:t>
             </a:r>
-            <a:endParaRPr b="1" sz="1500">
+            <a:endParaRPr sz="1500" b="1" dirty="0">
               <a:solidFill>
                 <a:srgbClr val="FF6C4C"/>
               </a:solidFill>
@@ -5673,12 +5794,12 @@
           </a:ln>
         </p:spPr>
         <p:txBody>
-          <a:bodyPr anchorCtr="0" anchor="t" bIns="91425" lIns="91425" spcFirstLastPara="1" rIns="91425" wrap="square" tIns="91425">
+          <a:bodyPr spcFirstLastPara="1" wrap="square" lIns="91425" tIns="91425" rIns="91425" bIns="91425" anchor="t" anchorCtr="0">
             <a:noAutofit/>
           </a:bodyPr>
           <a:lstStyle/>
           <a:p>
-            <a:pPr indent="0" lvl="0" marL="0" rtl="0" algn="l">
+            <a:pPr marL="0" lvl="0" indent="0" algn="l" rtl="0">
               <a:spcBef>
                 <a:spcPts val="0"/>
               </a:spcBef>
@@ -5688,7 +5809,7 @@
               <a:buNone/>
             </a:pPr>
             <a:r>
-              <a:rPr b="1" lang="en" sz="1100">
+              <a:rPr lang="en" sz="1100" b="1">
                 <a:solidFill>
                   <a:srgbClr val="FFBF40"/>
                 </a:solidFill>
@@ -5699,7 +5820,7 @@
               </a:rPr>
               <a:t>&lt;&lt;Arquetipo&gt;&gt;</a:t>
             </a:r>
-            <a:endParaRPr b="1" sz="1000">
+            <a:endParaRPr sz="1000" b="1">
               <a:solidFill>
                 <a:srgbClr val="FFBF40"/>
               </a:solidFill>
@@ -5731,12 +5852,12 @@
           </a:ln>
         </p:spPr>
         <p:txBody>
-          <a:bodyPr anchorCtr="0" anchor="t" bIns="91425" lIns="91425" spcFirstLastPara="1" rIns="91425" wrap="square" tIns="91425">
+          <a:bodyPr spcFirstLastPara="1" wrap="square" lIns="91425" tIns="91425" rIns="91425" bIns="91425" anchor="t" anchorCtr="0">
             <a:noAutofit/>
           </a:bodyPr>
           <a:lstStyle/>
           <a:p>
-            <a:pPr indent="0" lvl="0" marL="0" rtl="0" algn="l">
+            <a:pPr marL="0" lvl="0" indent="0" algn="l" rtl="0">
               <a:spcBef>
                 <a:spcPts val="0"/>
               </a:spcBef>
@@ -5746,7 +5867,7 @@
               <a:buNone/>
             </a:pPr>
             <a:r>
-              <a:rPr lang="en" sz="800">
+              <a:rPr lang="en" sz="800" dirty="0">
                 <a:solidFill>
                   <a:schemeClr val="lt1"/>
                 </a:solidFill>
@@ -5755,9 +5876,9 @@
                 <a:cs typeface="Archivo Medium"/>
                 <a:sym typeface="Archivo Medium"/>
               </a:rPr>
-              <a:t>&lt;&lt;Descripción_Resol_Conflictos&gt;&gt;</a:t>
+              <a:t>&lt;&lt;desc_res_con&gt;&gt;</a:t>
             </a:r>
-            <a:endParaRPr sz="700">
+            <a:endParaRPr sz="700" dirty="0">
               <a:solidFill>
                 <a:schemeClr val="lt1"/>
               </a:solidFill>
@@ -5789,12 +5910,12 @@
           </a:ln>
         </p:spPr>
         <p:txBody>
-          <a:bodyPr anchorCtr="0" anchor="t" bIns="91425" lIns="91425" spcFirstLastPara="1" rIns="91425" wrap="square" tIns="91425">
+          <a:bodyPr spcFirstLastPara="1" wrap="square" lIns="91425" tIns="91425" rIns="91425" bIns="91425" anchor="t" anchorCtr="0">
             <a:noAutofit/>
           </a:bodyPr>
           <a:lstStyle/>
           <a:p>
-            <a:pPr indent="0" lvl="0" marL="0" rtl="0" algn="l">
+            <a:pPr marL="0" lvl="0" indent="0" algn="l" rtl="0">
               <a:spcBef>
                 <a:spcPts val="0"/>
               </a:spcBef>
@@ -5804,7 +5925,7 @@
               <a:buNone/>
             </a:pPr>
             <a:r>
-              <a:rPr lang="en" sz="800">
+              <a:rPr lang="en" sz="800" dirty="0">
                 <a:solidFill>
                   <a:schemeClr val="lt1"/>
                 </a:solidFill>
@@ -5813,9 +5934,9 @@
                 <a:cs typeface="Archivo Medium"/>
                 <a:sym typeface="Archivo Medium"/>
               </a:rPr>
-              <a:t>&lt;&lt;Descripción_Int_Emocional&gt;&gt;</a:t>
+              <a:t>&lt;&lt;desc_int_emo&gt;&gt;</a:t>
             </a:r>
-            <a:endParaRPr sz="600">
+            <a:endParaRPr sz="600" dirty="0">
               <a:solidFill>
                 <a:schemeClr val="lt1"/>
               </a:solidFill>
@@ -5836,7 +5957,7 @@
 </file>
 
 <file path=ppt/theme/theme1.xml><?xml version="1.0" encoding="utf-8"?>
-<a:theme xmlns:a="http://schemas.openxmlformats.org/drawingml/2006/main" xmlns:r="http://schemas.openxmlformats.org/officeDocument/2006/relationships" name="Simple Light">
+<a:theme xmlns:a="http://schemas.openxmlformats.org/drawingml/2006/main" name="Simple Light">
   <a:themeElements>
     <a:clrScheme name="Simple Light">
       <a:dk1>
@@ -6111,11 +6232,13 @@
       </a:bgFillStyleLst>
     </a:fmtScheme>
   </a:themeElements>
+  <a:objectDefaults/>
+  <a:extraClrSchemeLst/>
 </a:theme>
 </file>
 
 <file path=ppt/theme/theme2.xml><?xml version="1.0" encoding="utf-8"?>
-<a:theme xmlns:a="http://schemas.openxmlformats.org/drawingml/2006/main" xmlns:r="http://schemas.openxmlformats.org/officeDocument/2006/relationships">
+<a:theme xmlns:a="http://schemas.openxmlformats.org/drawingml/2006/main">
   <a:themeElements>
     <a:clrScheme name="Default">
       <a:dk1>
@@ -6390,5 +6513,7 @@
       </a:bgFillStyleLst>
     </a:fmtScheme>
   </a:themeElements>
+  <a:objectDefaults/>
+  <a:extraClrSchemeLst/>
 </a:theme>
 </file>